--- a/prez/Présentation Active Learning.pptx
+++ b/prez/Présentation Active Learning.pptx
@@ -38402,7 +38402,7 @@
               <a:t> les 25 reviews </a:t>
             </a:r>
             <a:r>
-              <a:rPr lang="en-GB"/>
+              <a:rPr lang="en-GB" dirty="0" err="1"/>
               <a:t>correspondantes</a:t>
             </a:r>
             <a:r>

--- a/prez/Présentation Active Learning.pptx
+++ b/prez/Présentation Active Learning.pptx
@@ -173,7 +173,7 @@
 <file path=ppt/revisionInfo.xml><?xml version="1.0" encoding="utf-8"?>
 <p1510:revInfo xmlns:a="http://schemas.openxmlformats.org/drawingml/2006/main" xmlns:r="http://schemas.openxmlformats.org/officeDocument/2006/relationships" xmlns:p1510="http://schemas.microsoft.com/office/powerpoint/2015/10/main">
   <p1510:revLst>
-    <p1510:client id="{69AD6934-BA48-C84E-A3FE-69B8E5D6B7CD}" v="1818" dt="2025-04-07T09:21:06.532"/>
+    <p1510:client id="{69AD6934-BA48-C84E-A3FE-69B8E5D6B7CD}" v="1842" dt="2025-04-08T15:56:27.070"/>
   </p1510:revLst>
 </p1510:revInfo>
 </file>
@@ -183,7 +183,7 @@
   <pc:docChgLst>
     <pc:chgData name="Jimmy GUERTIN" userId="60d5e20f-7699-43de-98b7-f4234786abe8" providerId="ADAL" clId="{69AD6934-BA48-C84E-A3FE-69B8E5D6B7CD}"/>
     <pc:docChg chg="undo redo custSel addSld delSld modSld sldOrd">
-      <pc:chgData name="Jimmy GUERTIN" userId="60d5e20f-7699-43de-98b7-f4234786abe8" providerId="ADAL" clId="{69AD6934-BA48-C84E-A3FE-69B8E5D6B7CD}" dt="2025-04-07T09:26:56.590" v="16338" actId="20577"/>
+      <pc:chgData name="Jimmy GUERTIN" userId="60d5e20f-7699-43de-98b7-f4234786abe8" providerId="ADAL" clId="{69AD6934-BA48-C84E-A3FE-69B8E5D6B7CD}" dt="2025-04-08T16:24:54.935" v="16689" actId="14100"/>
       <pc:docMkLst>
         <pc:docMk/>
       </pc:docMkLst>
@@ -1381,7 +1381,7 @@
         </pc:spChg>
       </pc:sldChg>
       <pc:sldChg chg="addSp delSp modSp add del mod modAnim">
-        <pc:chgData name="Jimmy GUERTIN" userId="60d5e20f-7699-43de-98b7-f4234786abe8" providerId="ADAL" clId="{69AD6934-BA48-C84E-A3FE-69B8E5D6B7CD}" dt="2025-04-07T07:36:42.948" v="14999"/>
+        <pc:chgData name="Jimmy GUERTIN" userId="60d5e20f-7699-43de-98b7-f4234786abe8" providerId="ADAL" clId="{69AD6934-BA48-C84E-A3FE-69B8E5D6B7CD}" dt="2025-04-08T13:39:56.944" v="16405" actId="113"/>
         <pc:sldMkLst>
           <pc:docMk/>
           <pc:sldMk cId="2875331974" sldId="2147375890"/>
@@ -1403,7 +1403,7 @@
           </ac:spMkLst>
         </pc:spChg>
         <pc:spChg chg="add mod">
-          <ac:chgData name="Jimmy GUERTIN" userId="60d5e20f-7699-43de-98b7-f4234786abe8" providerId="ADAL" clId="{69AD6934-BA48-C84E-A3FE-69B8E5D6B7CD}" dt="2025-04-02T13:16:31.934" v="10356" actId="20577"/>
+          <ac:chgData name="Jimmy GUERTIN" userId="60d5e20f-7699-43de-98b7-f4234786abe8" providerId="ADAL" clId="{69AD6934-BA48-C84E-A3FE-69B8E5D6B7CD}" dt="2025-04-08T13:39:56.944" v="16405" actId="113"/>
           <ac:spMkLst>
             <pc:docMk/>
             <pc:sldMk cId="2875331974" sldId="2147375890"/>
@@ -1443,6 +1443,14 @@
           </ac:picMkLst>
         </pc:picChg>
         <pc:picChg chg="add mod">
+          <ac:chgData name="Jimmy GUERTIN" userId="60d5e20f-7699-43de-98b7-f4234786abe8" providerId="ADAL" clId="{69AD6934-BA48-C84E-A3FE-69B8E5D6B7CD}" dt="2025-04-08T09:21:15.494" v="16360" actId="167"/>
+          <ac:picMkLst>
+            <pc:docMk/>
+            <pc:sldMk cId="2875331974" sldId="2147375890"/>
+            <ac:picMk id="9" creationId="{6FD86277-82CB-9333-C861-BC5E2259B805}"/>
+          </ac:picMkLst>
+        </pc:picChg>
+        <pc:picChg chg="add mod">
           <ac:chgData name="Jimmy GUERTIN" userId="60d5e20f-7699-43de-98b7-f4234786abe8" providerId="ADAL" clId="{69AD6934-BA48-C84E-A3FE-69B8E5D6B7CD}" dt="2025-03-19T16:21:27.869" v="1091" actId="1076"/>
           <ac:picMkLst>
             <pc:docMk/>
@@ -1450,8 +1458,8 @@
             <ac:picMk id="24" creationId="{46802393-0DCB-A79B-EA9F-8FDE76A9256B}"/>
           </ac:picMkLst>
         </pc:picChg>
-        <pc:picChg chg="add mod">
-          <ac:chgData name="Jimmy GUERTIN" userId="60d5e20f-7699-43de-98b7-f4234786abe8" providerId="ADAL" clId="{69AD6934-BA48-C84E-A3FE-69B8E5D6B7CD}" dt="2025-04-01T09:26:46.520" v="6016" actId="1076"/>
+        <pc:picChg chg="add del mod">
+          <ac:chgData name="Jimmy GUERTIN" userId="60d5e20f-7699-43de-98b7-f4234786abe8" providerId="ADAL" clId="{69AD6934-BA48-C84E-A3FE-69B8E5D6B7CD}" dt="2025-04-08T09:20:34.051" v="16352" actId="478"/>
           <ac:picMkLst>
             <pc:docMk/>
             <pc:sldMk cId="2875331974" sldId="2147375890"/>
@@ -1862,7 +1870,7 @@
         </pc:sldMkLst>
       </pc:sldChg>
       <pc:sldChg chg="addSp delSp modSp add mod ord">
-        <pc:chgData name="Jimmy GUERTIN" userId="60d5e20f-7699-43de-98b7-f4234786abe8" providerId="ADAL" clId="{69AD6934-BA48-C84E-A3FE-69B8E5D6B7CD}" dt="2025-04-07T07:38:32.806" v="15001" actId="20577"/>
+        <pc:chgData name="Jimmy GUERTIN" userId="60d5e20f-7699-43de-98b7-f4234786abe8" providerId="ADAL" clId="{69AD6934-BA48-C84E-A3FE-69B8E5D6B7CD}" dt="2025-04-08T16:23:14.427" v="16687" actId="20577"/>
         <pc:sldMkLst>
           <pc:docMk/>
           <pc:sldMk cId="3772428488" sldId="2147375913"/>
@@ -1924,7 +1932,7 @@
           </ac:spMkLst>
         </pc:spChg>
         <pc:spChg chg="add mod">
-          <ac:chgData name="Jimmy GUERTIN" userId="60d5e20f-7699-43de-98b7-f4234786abe8" providerId="ADAL" clId="{69AD6934-BA48-C84E-A3FE-69B8E5D6B7CD}" dt="2025-04-03T07:28:49.541" v="12530" actId="20577"/>
+          <ac:chgData name="Jimmy GUERTIN" userId="60d5e20f-7699-43de-98b7-f4234786abe8" providerId="ADAL" clId="{69AD6934-BA48-C84E-A3FE-69B8E5D6B7CD}" dt="2025-04-08T14:07:02.784" v="16434" actId="20577"/>
           <ac:spMkLst>
             <pc:docMk/>
             <pc:sldMk cId="3772428488" sldId="2147375913"/>
@@ -1940,7 +1948,7 @@
           </ac:spMkLst>
         </pc:spChg>
         <pc:spChg chg="add mod">
-          <ac:chgData name="Jimmy GUERTIN" userId="60d5e20f-7699-43de-98b7-f4234786abe8" providerId="ADAL" clId="{69AD6934-BA48-C84E-A3FE-69B8E5D6B7CD}" dt="2025-04-03T07:30:15.782" v="12648" actId="20577"/>
+          <ac:chgData name="Jimmy GUERTIN" userId="60d5e20f-7699-43de-98b7-f4234786abe8" providerId="ADAL" clId="{69AD6934-BA48-C84E-A3FE-69B8E5D6B7CD}" dt="2025-04-08T16:22:44.072" v="16677" actId="20577"/>
           <ac:spMkLst>
             <pc:docMk/>
             <pc:sldMk cId="3772428488" sldId="2147375913"/>
@@ -1964,7 +1972,7 @@
           </ac:spMkLst>
         </pc:spChg>
         <pc:spChg chg="mod">
-          <ac:chgData name="Jimmy GUERTIN" userId="60d5e20f-7699-43de-98b7-f4234786abe8" providerId="ADAL" clId="{69AD6934-BA48-C84E-A3FE-69B8E5D6B7CD}" dt="2025-04-03T07:27:01.130" v="12454" actId="20577"/>
+          <ac:chgData name="Jimmy GUERTIN" userId="60d5e20f-7699-43de-98b7-f4234786abe8" providerId="ADAL" clId="{69AD6934-BA48-C84E-A3FE-69B8E5D6B7CD}" dt="2025-04-08T16:23:11.179" v="16683" actId="20577"/>
           <ac:spMkLst>
             <pc:docMk/>
             <pc:sldMk cId="3772428488" sldId="2147375913"/>
@@ -1980,7 +1988,7 @@
           </ac:spMkLst>
         </pc:spChg>
         <pc:spChg chg="mod">
-          <ac:chgData name="Jimmy GUERTIN" userId="60d5e20f-7699-43de-98b7-f4234786abe8" providerId="ADAL" clId="{69AD6934-BA48-C84E-A3FE-69B8E5D6B7CD}" dt="2025-04-03T07:27:11.520" v="12471" actId="20577"/>
+          <ac:chgData name="Jimmy GUERTIN" userId="60d5e20f-7699-43de-98b7-f4234786abe8" providerId="ADAL" clId="{69AD6934-BA48-C84E-A3FE-69B8E5D6B7CD}" dt="2025-04-08T16:23:14.427" v="16687" actId="20577"/>
           <ac:spMkLst>
             <pc:docMk/>
             <pc:sldMk cId="3772428488" sldId="2147375913"/>
@@ -1996,7 +2004,7 @@
           </ac:spMkLst>
         </pc:spChg>
         <pc:spChg chg="mod">
-          <ac:chgData name="Jimmy GUERTIN" userId="60d5e20f-7699-43de-98b7-f4234786abe8" providerId="ADAL" clId="{69AD6934-BA48-C84E-A3FE-69B8E5D6B7CD}" dt="2025-04-03T07:30:10.548" v="12647" actId="20577"/>
+          <ac:chgData name="Jimmy GUERTIN" userId="60d5e20f-7699-43de-98b7-f4234786abe8" providerId="ADAL" clId="{69AD6934-BA48-C84E-A3FE-69B8E5D6B7CD}" dt="2025-04-08T14:07:56.812" v="16435" actId="20577"/>
           <ac:spMkLst>
             <pc:docMk/>
             <pc:sldMk cId="3772428488" sldId="2147375913"/>
@@ -2575,29 +2583,29 @@
         </pc:sldMkLst>
       </pc:sldChg>
       <pc:sldChg chg="addSp delSp modSp add mod">
-        <pc:chgData name="Jimmy GUERTIN" userId="60d5e20f-7699-43de-98b7-f4234786abe8" providerId="ADAL" clId="{69AD6934-BA48-C84E-A3FE-69B8E5D6B7CD}" dt="2025-04-07T07:39:54.165" v="15002" actId="113"/>
+        <pc:chgData name="Jimmy GUERTIN" userId="60d5e20f-7699-43de-98b7-f4234786abe8" providerId="ADAL" clId="{69AD6934-BA48-C84E-A3FE-69B8E5D6B7CD}" dt="2025-04-08T15:58:26.005" v="16652" actId="14100"/>
         <pc:sldMkLst>
           <pc:docMk/>
           <pc:sldMk cId="2641726465" sldId="2147375919"/>
         </pc:sldMkLst>
         <pc:spChg chg="mod">
-          <ac:chgData name="Jimmy GUERTIN" userId="60d5e20f-7699-43de-98b7-f4234786abe8" providerId="ADAL" clId="{69AD6934-BA48-C84E-A3FE-69B8E5D6B7CD}" dt="2025-04-03T12:04:29.061" v="13958" actId="1076"/>
+          <ac:chgData name="Jimmy GUERTIN" userId="60d5e20f-7699-43de-98b7-f4234786abe8" providerId="ADAL" clId="{69AD6934-BA48-C84E-A3FE-69B8E5D6B7CD}" dt="2025-04-08T15:52:54.868" v="16571" actId="1076"/>
           <ac:spMkLst>
             <pc:docMk/>
             <pc:sldMk cId="2641726465" sldId="2147375919"/>
             <ac:spMk id="3" creationId="{D4CA9B8D-AD3A-18AF-080C-633A0E7CFA4E}"/>
           </ac:spMkLst>
         </pc:spChg>
-        <pc:spChg chg="add mod">
-          <ac:chgData name="Jimmy GUERTIN" userId="60d5e20f-7699-43de-98b7-f4234786abe8" providerId="ADAL" clId="{69AD6934-BA48-C84E-A3FE-69B8E5D6B7CD}" dt="2025-04-03T12:06:23.479" v="14019" actId="14100"/>
+        <pc:spChg chg="add del mod">
+          <ac:chgData name="Jimmy GUERTIN" userId="60d5e20f-7699-43de-98b7-f4234786abe8" providerId="ADAL" clId="{69AD6934-BA48-C84E-A3FE-69B8E5D6B7CD}" dt="2025-04-08T15:45:53.016" v="16511" actId="478"/>
           <ac:spMkLst>
             <pc:docMk/>
             <pc:sldMk cId="2641726465" sldId="2147375919"/>
             <ac:spMk id="6" creationId="{FC4FAEE7-F7DD-7FB8-1514-7853D17974D4}"/>
           </ac:spMkLst>
         </pc:spChg>
-        <pc:spChg chg="add mod">
-          <ac:chgData name="Jimmy GUERTIN" userId="60d5e20f-7699-43de-98b7-f4234786abe8" providerId="ADAL" clId="{69AD6934-BA48-C84E-A3FE-69B8E5D6B7CD}" dt="2025-04-02T12:59:34.490" v="10133"/>
+        <pc:spChg chg="add del mod">
+          <ac:chgData name="Jimmy GUERTIN" userId="60d5e20f-7699-43de-98b7-f4234786abe8" providerId="ADAL" clId="{69AD6934-BA48-C84E-A3FE-69B8E5D6B7CD}" dt="2025-04-08T15:42:47.846" v="16478" actId="478"/>
           <ac:spMkLst>
             <pc:docMk/>
             <pc:sldMk cId="2641726465" sldId="2147375919"/>
@@ -2605,47 +2613,79 @@
           </ac:spMkLst>
         </pc:spChg>
         <pc:spChg chg="add mod">
-          <ac:chgData name="Jimmy GUERTIN" userId="60d5e20f-7699-43de-98b7-f4234786abe8" providerId="ADAL" clId="{69AD6934-BA48-C84E-A3FE-69B8E5D6B7CD}" dt="2025-04-07T07:39:54.165" v="15002" actId="113"/>
+          <ac:chgData name="Jimmy GUERTIN" userId="60d5e20f-7699-43de-98b7-f4234786abe8" providerId="ADAL" clId="{69AD6934-BA48-C84E-A3FE-69B8E5D6B7CD}" dt="2025-04-08T15:50:06.957" v="16538" actId="1076"/>
           <ac:spMkLst>
             <pc:docMk/>
             <pc:sldMk cId="2641726465" sldId="2147375919"/>
             <ac:spMk id="8" creationId="{77CAB4AF-38A8-BCDE-ED21-6F296E11E2DE}"/>
           </ac:spMkLst>
         </pc:spChg>
-        <pc:spChg chg="add mod">
-          <ac:chgData name="Jimmy GUERTIN" userId="60d5e20f-7699-43de-98b7-f4234786abe8" providerId="ADAL" clId="{69AD6934-BA48-C84E-A3FE-69B8E5D6B7CD}" dt="2025-04-03T12:08:46.076" v="14147" actId="14100"/>
+        <pc:spChg chg="add del mod">
+          <ac:chgData name="Jimmy GUERTIN" userId="60d5e20f-7699-43de-98b7-f4234786abe8" providerId="ADAL" clId="{69AD6934-BA48-C84E-A3FE-69B8E5D6B7CD}" dt="2025-04-08T15:44:02.502" v="16503" actId="478"/>
           <ac:spMkLst>
             <pc:docMk/>
             <pc:sldMk cId="2641726465" sldId="2147375919"/>
             <ac:spMk id="9" creationId="{349E058F-7653-8FD4-8492-7B21B38A2B1E}"/>
           </ac:spMkLst>
         </pc:spChg>
-        <pc:spChg chg="add mod">
-          <ac:chgData name="Jimmy GUERTIN" userId="60d5e20f-7699-43de-98b7-f4234786abe8" providerId="ADAL" clId="{69AD6934-BA48-C84E-A3FE-69B8E5D6B7CD}" dt="2025-04-03T12:06:05.241" v="14015" actId="1035"/>
+        <pc:spChg chg="add del mod">
+          <ac:chgData name="Jimmy GUERTIN" userId="60d5e20f-7699-43de-98b7-f4234786abe8" providerId="ADAL" clId="{69AD6934-BA48-C84E-A3FE-69B8E5D6B7CD}" dt="2025-04-08T15:42:47.846" v="16478" actId="478"/>
           <ac:spMkLst>
             <pc:docMk/>
             <pc:sldMk cId="2641726465" sldId="2147375919"/>
             <ac:spMk id="10" creationId="{71FECF36-344D-E88D-3F90-421B122FBE0A}"/>
           </ac:spMkLst>
         </pc:spChg>
+        <pc:spChg chg="add del mod">
+          <ac:chgData name="Jimmy GUERTIN" userId="60d5e20f-7699-43de-98b7-f4234786abe8" providerId="ADAL" clId="{69AD6934-BA48-C84E-A3FE-69B8E5D6B7CD}" dt="2025-04-08T15:51:28.727" v="16558" actId="478"/>
+          <ac:spMkLst>
+            <pc:docMk/>
+            <pc:sldMk cId="2641726465" sldId="2147375919"/>
+            <ac:spMk id="12" creationId="{D7C93E4D-9C21-9FA8-B2BF-7790D670C0D0}"/>
+          </ac:spMkLst>
+        </pc:spChg>
         <pc:spChg chg="add mod">
-          <ac:chgData name="Jimmy GUERTIN" userId="60d5e20f-7699-43de-98b7-f4234786abe8" providerId="ADAL" clId="{69AD6934-BA48-C84E-A3FE-69B8E5D6B7CD}" dt="2025-04-03T12:08:31.723" v="14145" actId="20577"/>
+          <ac:chgData name="Jimmy GUERTIN" userId="60d5e20f-7699-43de-98b7-f4234786abe8" providerId="ADAL" clId="{69AD6934-BA48-C84E-A3FE-69B8E5D6B7CD}" dt="2025-04-08T15:58:26.005" v="16652" actId="14100"/>
+          <ac:spMkLst>
+            <pc:docMk/>
+            <pc:sldMk cId="2641726465" sldId="2147375919"/>
+            <ac:spMk id="15" creationId="{BE9729BF-54BF-95C9-00A8-49E1D25845A9}"/>
+          </ac:spMkLst>
+        </pc:spChg>
+        <pc:spChg chg="add mod">
+          <ac:chgData name="Jimmy GUERTIN" userId="60d5e20f-7699-43de-98b7-f4234786abe8" providerId="ADAL" clId="{69AD6934-BA48-C84E-A3FE-69B8E5D6B7CD}" dt="2025-04-08T15:58:14.169" v="16650" actId="1036"/>
+          <ac:spMkLst>
+            <pc:docMk/>
+            <pc:sldMk cId="2641726465" sldId="2147375919"/>
+            <ac:spMk id="16" creationId="{C62FCB2B-309B-4EBC-395D-14B9EBBDD447}"/>
+          </ac:spMkLst>
+        </pc:spChg>
+        <pc:spChg chg="add mod">
+          <ac:chgData name="Jimmy GUERTIN" userId="60d5e20f-7699-43de-98b7-f4234786abe8" providerId="ADAL" clId="{69AD6934-BA48-C84E-A3FE-69B8E5D6B7CD}" dt="2025-04-08T15:58:21.703" v="16651" actId="1076"/>
           <ac:spMkLst>
             <pc:docMk/>
             <pc:sldMk cId="2641726465" sldId="2147375919"/>
             <ac:spMk id="17" creationId="{A5B4ACF3-CF5B-30AD-20CB-84CF4DDBA782}"/>
           </ac:spMkLst>
         </pc:spChg>
-        <pc:spChg chg="add mod">
-          <ac:chgData name="Jimmy GUERTIN" userId="60d5e20f-7699-43de-98b7-f4234786abe8" providerId="ADAL" clId="{69AD6934-BA48-C84E-A3FE-69B8E5D6B7CD}" dt="2025-04-03T12:08:36.004" v="14146" actId="208"/>
+        <pc:spChg chg="add del mod">
+          <ac:chgData name="Jimmy GUERTIN" userId="60d5e20f-7699-43de-98b7-f4234786abe8" providerId="ADAL" clId="{69AD6934-BA48-C84E-A3FE-69B8E5D6B7CD}" dt="2025-04-08T15:55:37.646" v="16607" actId="478"/>
           <ac:spMkLst>
             <pc:docMk/>
             <pc:sldMk cId="2641726465" sldId="2147375919"/>
             <ac:spMk id="18" creationId="{676DDDA8-3ACE-342E-EC31-1A4E96F69819}"/>
           </ac:spMkLst>
         </pc:spChg>
+        <pc:spChg chg="add mod">
+          <ac:chgData name="Jimmy GUERTIN" userId="60d5e20f-7699-43de-98b7-f4234786abe8" providerId="ADAL" clId="{69AD6934-BA48-C84E-A3FE-69B8E5D6B7CD}" dt="2025-04-08T15:58:14.169" v="16650" actId="1036"/>
+          <ac:spMkLst>
+            <pc:docMk/>
+            <pc:sldMk cId="2641726465" sldId="2147375919"/>
+            <ac:spMk id="21" creationId="{3ADE73F5-0E39-46B1-73AE-9AE678D68F47}"/>
+          </ac:spMkLst>
+        </pc:spChg>
         <pc:spChg chg="mod">
-          <ac:chgData name="Jimmy GUERTIN" userId="60d5e20f-7699-43de-98b7-f4234786abe8" providerId="ADAL" clId="{69AD6934-BA48-C84E-A3FE-69B8E5D6B7CD}" dt="2025-04-03T12:05:20.651" v="14006" actId="1076"/>
+          <ac:chgData name="Jimmy GUERTIN" userId="60d5e20f-7699-43de-98b7-f4234786abe8" providerId="ADAL" clId="{69AD6934-BA48-C84E-A3FE-69B8E5D6B7CD}" dt="2025-04-08T15:49:27.626" v="16533" actId="1076"/>
           <ac:spMkLst>
             <pc:docMk/>
             <pc:sldMk cId="2641726465" sldId="2147375919"/>
@@ -2653,23 +2693,55 @@
           </ac:spMkLst>
         </pc:spChg>
         <pc:picChg chg="add mod">
-          <ac:chgData name="Jimmy GUERTIN" userId="60d5e20f-7699-43de-98b7-f4234786abe8" providerId="ADAL" clId="{69AD6934-BA48-C84E-A3FE-69B8E5D6B7CD}" dt="2025-04-03T12:06:19.443" v="14018" actId="1076"/>
+          <ac:chgData name="Jimmy GUERTIN" userId="60d5e20f-7699-43de-98b7-f4234786abe8" providerId="ADAL" clId="{69AD6934-BA48-C84E-A3FE-69B8E5D6B7CD}" dt="2025-04-08T15:50:02.505" v="16537" actId="1076"/>
+          <ac:picMkLst>
+            <pc:docMk/>
+            <pc:sldMk cId="2641726465" sldId="2147375919"/>
+            <ac:picMk id="2" creationId="{48FCF1B2-A717-69DD-6AC7-1D2992ECE404}"/>
+          </ac:picMkLst>
+        </pc:picChg>
+        <pc:picChg chg="add del mod">
+          <ac:chgData name="Jimmy GUERTIN" userId="60d5e20f-7699-43de-98b7-f4234786abe8" providerId="ADAL" clId="{69AD6934-BA48-C84E-A3FE-69B8E5D6B7CD}" dt="2025-04-08T15:43:51.733" v="16499" actId="478"/>
+          <ac:picMkLst>
+            <pc:docMk/>
+            <pc:sldMk cId="2641726465" sldId="2147375919"/>
+            <ac:picMk id="4" creationId="{8E45704C-96FC-C0C5-232A-5331865A159A}"/>
+          </ac:picMkLst>
+        </pc:picChg>
+        <pc:picChg chg="add mod">
+          <ac:chgData name="Jimmy GUERTIN" userId="60d5e20f-7699-43de-98b7-f4234786abe8" providerId="ADAL" clId="{69AD6934-BA48-C84E-A3FE-69B8E5D6B7CD}" dt="2025-04-08T15:58:14.169" v="16650" actId="1036"/>
+          <ac:picMkLst>
+            <pc:docMk/>
+            <pc:sldMk cId="2641726465" sldId="2147375919"/>
+            <ac:picMk id="5" creationId="{7C710CA8-F708-7AB0-7379-2735ECE3061C}"/>
+          </ac:picMkLst>
+        </pc:picChg>
+        <pc:picChg chg="add mod">
+          <ac:chgData name="Jimmy GUERTIN" userId="60d5e20f-7699-43de-98b7-f4234786abe8" providerId="ADAL" clId="{69AD6934-BA48-C84E-A3FE-69B8E5D6B7CD}" dt="2025-04-08T15:44:13.082" v="16506"/>
+          <ac:picMkLst>
+            <pc:docMk/>
+            <pc:sldMk cId="2641726465" sldId="2147375919"/>
+            <ac:picMk id="11" creationId="{9314BBBC-83B5-2DD8-0E25-EDFAC6A21649}"/>
+          </ac:picMkLst>
+        </pc:picChg>
+        <pc:picChg chg="add del mod">
+          <ac:chgData name="Jimmy GUERTIN" userId="60d5e20f-7699-43de-98b7-f4234786abe8" providerId="ADAL" clId="{69AD6934-BA48-C84E-A3FE-69B8E5D6B7CD}" dt="2025-04-08T15:38:11.597" v="16462" actId="478"/>
           <ac:picMkLst>
             <pc:docMk/>
             <pc:sldMk cId="2641726465" sldId="2147375919"/>
             <ac:picMk id="13" creationId="{6FA23D6D-4A8A-5FE1-D6AA-802C3C519A4F}"/>
           </ac:picMkLst>
         </pc:picChg>
-        <pc:picChg chg="add mod">
-          <ac:chgData name="Jimmy GUERTIN" userId="60d5e20f-7699-43de-98b7-f4234786abe8" providerId="ADAL" clId="{69AD6934-BA48-C84E-A3FE-69B8E5D6B7CD}" dt="2025-04-03T12:07:20.087" v="14022" actId="1076"/>
+        <pc:picChg chg="add del mod">
+          <ac:chgData name="Jimmy GUERTIN" userId="60d5e20f-7699-43de-98b7-f4234786abe8" providerId="ADAL" clId="{69AD6934-BA48-C84E-A3FE-69B8E5D6B7CD}" dt="2025-04-08T15:38:08.064" v="16460" actId="478"/>
           <ac:picMkLst>
             <pc:docMk/>
             <pc:sldMk cId="2641726465" sldId="2147375919"/>
             <ac:picMk id="14" creationId="{FE12C25B-DFE0-B38D-4D00-BD590C9054F5}"/>
           </ac:picMkLst>
         </pc:picChg>
-        <pc:picChg chg="add mod">
-          <ac:chgData name="Jimmy GUERTIN" userId="60d5e20f-7699-43de-98b7-f4234786abe8" providerId="ADAL" clId="{69AD6934-BA48-C84E-A3FE-69B8E5D6B7CD}" dt="2025-04-03T12:08:13.194" v="14135" actId="1076"/>
+        <pc:picChg chg="add del mod">
+          <ac:chgData name="Jimmy GUERTIN" userId="60d5e20f-7699-43de-98b7-f4234786abe8" providerId="ADAL" clId="{69AD6934-BA48-C84E-A3FE-69B8E5D6B7CD}" dt="2025-04-08T15:38:11.597" v="16462" actId="478"/>
           <ac:picMkLst>
             <pc:docMk/>
             <pc:sldMk cId="2641726465" sldId="2147375919"/>
@@ -2677,7 +2749,15 @@
           </ac:picMkLst>
         </pc:picChg>
         <pc:picChg chg="add mod">
-          <ac:chgData name="Jimmy GUERTIN" userId="60d5e20f-7699-43de-98b7-f4234786abe8" providerId="ADAL" clId="{69AD6934-BA48-C84E-A3FE-69B8E5D6B7CD}" dt="2025-04-03T12:08:05.374" v="14133" actId="1076"/>
+          <ac:chgData name="Jimmy GUERTIN" userId="60d5e20f-7699-43de-98b7-f4234786abe8" providerId="ADAL" clId="{69AD6934-BA48-C84E-A3FE-69B8E5D6B7CD}" dt="2025-04-08T15:56:35.853" v="16625" actId="1076"/>
+          <ac:picMkLst>
+            <pc:docMk/>
+            <pc:sldMk cId="2641726465" sldId="2147375919"/>
+            <ac:picMk id="20" creationId="{30F675D7-2782-E3F9-6F2A-C6FD35A07553}"/>
+          </ac:picMkLst>
+        </pc:picChg>
+        <pc:picChg chg="add del mod">
+          <ac:chgData name="Jimmy GUERTIN" userId="60d5e20f-7699-43de-98b7-f4234786abe8" providerId="ADAL" clId="{69AD6934-BA48-C84E-A3FE-69B8E5D6B7CD}" dt="2025-04-08T15:38:09.584" v="16461" actId="478"/>
           <ac:picMkLst>
             <pc:docMk/>
             <pc:sldMk cId="2641726465" sldId="2147375919"/>
@@ -2762,7 +2842,7 @@
         </pc:picChg>
       </pc:sldChg>
       <pc:sldChg chg="addSp delSp modSp add del mod">
-        <pc:chgData name="Jimmy GUERTIN" userId="60d5e20f-7699-43de-98b7-f4234786abe8" providerId="ADAL" clId="{69AD6934-BA48-C84E-A3FE-69B8E5D6B7CD}" dt="2025-04-03T12:12:33.704" v="14292" actId="20577"/>
+        <pc:chgData name="Jimmy GUERTIN" userId="60d5e20f-7699-43de-98b7-f4234786abe8" providerId="ADAL" clId="{69AD6934-BA48-C84E-A3FE-69B8E5D6B7CD}" dt="2025-04-08T13:43:24.285" v="16425" actId="20577"/>
         <pc:sldMkLst>
           <pc:docMk/>
           <pc:sldMk cId="467290333" sldId="2147375924"/>
@@ -2776,7 +2856,7 @@
           </ac:spMkLst>
         </pc:spChg>
         <pc:spChg chg="mod">
-          <ac:chgData name="Jimmy GUERTIN" userId="60d5e20f-7699-43de-98b7-f4234786abe8" providerId="ADAL" clId="{69AD6934-BA48-C84E-A3FE-69B8E5D6B7CD}" dt="2025-03-27T15:50:48.330" v="4363" actId="20577"/>
+          <ac:chgData name="Jimmy GUERTIN" userId="60d5e20f-7699-43de-98b7-f4234786abe8" providerId="ADAL" clId="{69AD6934-BA48-C84E-A3FE-69B8E5D6B7CD}" dt="2025-04-08T13:43:24.285" v="16425" actId="20577"/>
           <ac:spMkLst>
             <pc:docMk/>
             <pc:sldMk cId="467290333" sldId="2147375924"/>
@@ -2863,13 +2943,13 @@
         </pc:picChg>
       </pc:sldChg>
       <pc:sldChg chg="addSp delSp modSp add mod">
-        <pc:chgData name="Jimmy GUERTIN" userId="60d5e20f-7699-43de-98b7-f4234786abe8" providerId="ADAL" clId="{69AD6934-BA48-C84E-A3FE-69B8E5D6B7CD}" dt="2025-04-03T12:00:31.737" v="13881" actId="208"/>
+        <pc:chgData name="Jimmy GUERTIN" userId="60d5e20f-7699-43de-98b7-f4234786abe8" providerId="ADAL" clId="{69AD6934-BA48-C84E-A3FE-69B8E5D6B7CD}" dt="2025-04-08T16:24:54.935" v="16689" actId="14100"/>
         <pc:sldMkLst>
           <pc:docMk/>
           <pc:sldMk cId="815082982" sldId="2147375926"/>
         </pc:sldMkLst>
         <pc:spChg chg="mod">
-          <ac:chgData name="Jimmy GUERTIN" userId="60d5e20f-7699-43de-98b7-f4234786abe8" providerId="ADAL" clId="{69AD6934-BA48-C84E-A3FE-69B8E5D6B7CD}" dt="2025-04-03T12:00:03.015" v="13872" actId="20577"/>
+          <ac:chgData name="Jimmy GUERTIN" userId="60d5e20f-7699-43de-98b7-f4234786abe8" providerId="ADAL" clId="{69AD6934-BA48-C84E-A3FE-69B8E5D6B7CD}" dt="2025-04-08T16:24:54.935" v="16689" actId="14100"/>
           <ac:spMkLst>
             <pc:docMk/>
             <pc:sldMk cId="815082982" sldId="2147375926"/>
@@ -3623,7 +3703,7 @@
         </pc:sldMkLst>
       </pc:sldChg>
       <pc:sldChg chg="addSp delSp modSp add mod ord">
-        <pc:chgData name="Jimmy GUERTIN" userId="60d5e20f-7699-43de-98b7-f4234786abe8" providerId="ADAL" clId="{69AD6934-BA48-C84E-A3FE-69B8E5D6B7CD}" dt="2025-04-03T12:01:30.761" v="13910"/>
+        <pc:chgData name="Jimmy GUERTIN" userId="60d5e20f-7699-43de-98b7-f4234786abe8" providerId="ADAL" clId="{69AD6934-BA48-C84E-A3FE-69B8E5D6B7CD}" dt="2025-04-08T08:58:39.001" v="16348" actId="20577"/>
         <pc:sldMkLst>
           <pc:docMk/>
           <pc:sldMk cId="3722480850" sldId="2147375933"/>
@@ -3637,7 +3717,7 @@
           </ac:spMkLst>
         </pc:spChg>
         <pc:spChg chg="add mod">
-          <ac:chgData name="Jimmy GUERTIN" userId="60d5e20f-7699-43de-98b7-f4234786abe8" providerId="ADAL" clId="{69AD6934-BA48-C84E-A3FE-69B8E5D6B7CD}" dt="2025-04-03T09:48:18.703" v="13303" actId="14100"/>
+          <ac:chgData name="Jimmy GUERTIN" userId="60d5e20f-7699-43de-98b7-f4234786abe8" providerId="ADAL" clId="{69AD6934-BA48-C84E-A3FE-69B8E5D6B7CD}" dt="2025-04-08T08:58:39.001" v="16348" actId="20577"/>
           <ac:spMkLst>
             <pc:docMk/>
             <pc:sldMk cId="3722480850" sldId="2147375933"/>
@@ -3654,7 +3734,7 @@
         </pc:picChg>
       </pc:sldChg>
       <pc:sldChg chg="addSp delSp modSp add mod ord">
-        <pc:chgData name="Jimmy GUERTIN" userId="60d5e20f-7699-43de-98b7-f4234786abe8" providerId="ADAL" clId="{69AD6934-BA48-C84E-A3FE-69B8E5D6B7CD}" dt="2025-04-03T12:01:34.843" v="13911"/>
+        <pc:chgData name="Jimmy GUERTIN" userId="60d5e20f-7699-43de-98b7-f4234786abe8" providerId="ADAL" clId="{69AD6934-BA48-C84E-A3FE-69B8E5D6B7CD}" dt="2025-04-08T08:59:02.997" v="16349" actId="313"/>
         <pc:sldMkLst>
           <pc:docMk/>
           <pc:sldMk cId="4141568960" sldId="2147375934"/>
@@ -3665,6 +3745,14 @@
             <pc:docMk/>
             <pc:sldMk cId="4141568960" sldId="2147375934"/>
             <ac:spMk id="2" creationId="{970DAE25-1960-21B6-4366-8216598FF0EB}"/>
+          </ac:spMkLst>
+        </pc:spChg>
+        <pc:spChg chg="mod">
+          <ac:chgData name="Jimmy GUERTIN" userId="60d5e20f-7699-43de-98b7-f4234786abe8" providerId="ADAL" clId="{69AD6934-BA48-C84E-A3FE-69B8E5D6B7CD}" dt="2025-04-08T08:59:02.997" v="16349" actId="313"/>
+          <ac:spMkLst>
+            <pc:docMk/>
+            <pc:sldMk cId="4141568960" sldId="2147375934"/>
+            <ac:spMk id="6" creationId="{B042109D-7888-CFC7-2A88-C451F442CE9A}"/>
           </ac:spMkLst>
         </pc:spChg>
         <pc:spChg chg="add mod">
@@ -3692,7 +3780,7 @@
         </pc:sldMkLst>
       </pc:sldChg>
       <pc:sldChg chg="addSp delSp modSp add mod ord">
-        <pc:chgData name="Jimmy GUERTIN" userId="60d5e20f-7699-43de-98b7-f4234786abe8" providerId="ADAL" clId="{69AD6934-BA48-C84E-A3FE-69B8E5D6B7CD}" dt="2025-04-03T15:02:35.156" v="14534"/>
+        <pc:chgData name="Jimmy GUERTIN" userId="60d5e20f-7699-43de-98b7-f4234786abe8" providerId="ADAL" clId="{69AD6934-BA48-C84E-A3FE-69B8E5D6B7CD}" dt="2025-04-08T08:59:06.130" v="16350" actId="313"/>
         <pc:sldMkLst>
           <pc:docMk/>
           <pc:sldMk cId="726256596" sldId="2147375936"/>
@@ -3703,6 +3791,14 @@
             <pc:docMk/>
             <pc:sldMk cId="726256596" sldId="2147375936"/>
             <ac:spMk id="2" creationId="{E31AFA2E-5125-0F88-7664-8620D76708A8}"/>
+          </ac:spMkLst>
+        </pc:spChg>
+        <pc:spChg chg="mod">
+          <ac:chgData name="Jimmy GUERTIN" userId="60d5e20f-7699-43de-98b7-f4234786abe8" providerId="ADAL" clId="{69AD6934-BA48-C84E-A3FE-69B8E5D6B7CD}" dt="2025-04-08T08:59:06.130" v="16350" actId="313"/>
+          <ac:spMkLst>
+            <pc:docMk/>
+            <pc:sldMk cId="726256596" sldId="2147375936"/>
+            <ac:spMk id="6" creationId="{F295C3EA-D508-DFA9-7CC2-01FACB43F0C3}"/>
           </ac:spMkLst>
         </pc:spChg>
         <pc:spChg chg="mod">
@@ -3731,7 +3827,7 @@
         </pc:picChg>
       </pc:sldChg>
       <pc:sldChg chg="addSp delSp modSp add del mod ord">
-        <pc:chgData name="Jimmy GUERTIN" userId="60d5e20f-7699-43de-98b7-f4234786abe8" providerId="ADAL" clId="{69AD6934-BA48-C84E-A3FE-69B8E5D6B7CD}" dt="2025-04-03T13:13:41.894" v="14465"/>
+        <pc:chgData name="Jimmy GUERTIN" userId="60d5e20f-7699-43de-98b7-f4234786abe8" providerId="ADAL" clId="{69AD6934-BA48-C84E-A3FE-69B8E5D6B7CD}" dt="2025-04-08T08:59:13.943" v="16351" actId="313"/>
         <pc:sldMkLst>
           <pc:docMk/>
           <pc:sldMk cId="2699913730" sldId="2147375937"/>
@@ -3742,6 +3838,14 @@
             <pc:docMk/>
             <pc:sldMk cId="2699913730" sldId="2147375937"/>
             <ac:spMk id="2" creationId="{56C4C5F4-61A3-2F99-4B2D-A8EA279A18C7}"/>
+          </ac:spMkLst>
+        </pc:spChg>
+        <pc:spChg chg="mod">
+          <ac:chgData name="Jimmy GUERTIN" userId="60d5e20f-7699-43de-98b7-f4234786abe8" providerId="ADAL" clId="{69AD6934-BA48-C84E-A3FE-69B8E5D6B7CD}" dt="2025-04-08T08:59:13.943" v="16351" actId="313"/>
+          <ac:spMkLst>
+            <pc:docMk/>
+            <pc:sldMk cId="2699913730" sldId="2147375937"/>
+            <ac:spMk id="6" creationId="{A8740BC1-3A8F-EE86-AD7C-3FBCFC2F1068}"/>
           </ac:spMkLst>
         </pc:spChg>
         <pc:spChg chg="mod">
@@ -3778,7 +3882,7 @@
         </pc:picChg>
       </pc:sldChg>
       <pc:sldChg chg="addSp delSp modSp add mod">
-        <pc:chgData name="Jimmy GUERTIN" userId="60d5e20f-7699-43de-98b7-f4234786abe8" providerId="ADAL" clId="{69AD6934-BA48-C84E-A3FE-69B8E5D6B7CD}" dt="2025-04-07T07:35:42.817" v="14995" actId="2711"/>
+        <pc:chgData name="Jimmy GUERTIN" userId="60d5e20f-7699-43de-98b7-f4234786abe8" providerId="ADAL" clId="{69AD6934-BA48-C84E-A3FE-69B8E5D6B7CD}" dt="2025-04-08T12:53:15.470" v="16397" actId="113"/>
         <pc:sldMkLst>
           <pc:docMk/>
           <pc:sldMk cId="2592310306" sldId="2147375938"/>
@@ -3792,7 +3896,7 @@
           </ac:spMkLst>
         </pc:spChg>
         <pc:spChg chg="add mod">
-          <ac:chgData name="Jimmy GUERTIN" userId="60d5e20f-7699-43de-98b7-f4234786abe8" providerId="ADAL" clId="{69AD6934-BA48-C84E-A3FE-69B8E5D6B7CD}" dt="2025-04-07T07:35:42.817" v="14995" actId="2711"/>
+          <ac:chgData name="Jimmy GUERTIN" userId="60d5e20f-7699-43de-98b7-f4234786abe8" providerId="ADAL" clId="{69AD6934-BA48-C84E-A3FE-69B8E5D6B7CD}" dt="2025-04-08T12:51:51.688" v="16372" actId="113"/>
           <ac:spMkLst>
             <pc:docMk/>
             <pc:sldMk cId="2592310306" sldId="2147375938"/>
@@ -3800,7 +3904,7 @@
           </ac:spMkLst>
         </pc:spChg>
         <pc:spChg chg="add mod">
-          <ac:chgData name="Jimmy GUERTIN" userId="60d5e20f-7699-43de-98b7-f4234786abe8" providerId="ADAL" clId="{69AD6934-BA48-C84E-A3FE-69B8E5D6B7CD}" dt="2025-04-07T07:34:35.479" v="14969" actId="113"/>
+          <ac:chgData name="Jimmy GUERTIN" userId="60d5e20f-7699-43de-98b7-f4234786abe8" providerId="ADAL" clId="{69AD6934-BA48-C84E-A3FE-69B8E5D6B7CD}" dt="2025-04-08T12:52:18.446" v="16376" actId="113"/>
           <ac:spMkLst>
             <pc:docMk/>
             <pc:sldMk cId="2592310306" sldId="2147375938"/>
@@ -3808,7 +3912,7 @@
           </ac:spMkLst>
         </pc:spChg>
         <pc:spChg chg="add mod">
-          <ac:chgData name="Jimmy GUERTIN" userId="60d5e20f-7699-43de-98b7-f4234786abe8" providerId="ADAL" clId="{69AD6934-BA48-C84E-A3FE-69B8E5D6B7CD}" dt="2025-04-07T07:34:35.479" v="14969" actId="113"/>
+          <ac:chgData name="Jimmy GUERTIN" userId="60d5e20f-7699-43de-98b7-f4234786abe8" providerId="ADAL" clId="{69AD6934-BA48-C84E-A3FE-69B8E5D6B7CD}" dt="2025-04-08T12:53:15.470" v="16397" actId="113"/>
           <ac:spMkLst>
             <pc:docMk/>
             <pc:sldMk cId="2592310306" sldId="2147375938"/>
@@ -4404,6 +4508,19 @@
           </a:p>
         </p188:txBody>
       </p188:reply>
+      <p188:reply id="{3806B288-DC19-144C-961B-07CFE6BA4109}" authorId="{94A73E68-2069-531B-8B48-F270E7F36FDF}" created="2025-04-08T14:14:59.515">
+        <p188:txBody>
+          <a:bodyPr/>
+          <a:lstStyle/>
+          <a:p>
+            <a:r>
+              <a:rPr lang="en-FR"/>
+              <a:t>Ajouter précision sur batch ratio : plus il est petit = plus on rentrai
+</a:t>
+            </a:r>
+          </a:p>
+        </p188:txBody>
+      </p188:reply>
     </p188:replyLst>
     <p188:txBody>
       <a:bodyPr/>
@@ -4543,6 +4660,33 @@
       <pc:docMk/>
       <pc:sldMk cId="2641726465" sldId="2147375919"/>
     </pc:sldMkLst>
+    <p188:replyLst>
+      <p188:reply id="{721C3257-AA9D-224D-A532-49832A628E30}" authorId="{94A73E68-2069-531B-8B48-F270E7F36FDF}" created="2025-04-08T14:22:42.022">
+        <p188:txBody>
+          <a:bodyPr/>
+          <a:lstStyle/>
+          <a:p>
+            <a:r>
+              <a:rPr lang="en-FR"/>
+              <a:t>Changer prs</a:t>
+            </a:r>
+          </a:p>
+        </p188:txBody>
+      </p188:reply>
+      <p188:reply id="{15E13E92-FEC3-BA48-96B1-D5394F48F3AF}" authorId="{94A73E68-2069-531B-8B48-F270E7F36FDF}" created="2025-04-08T14:27:08.706">
+        <p188:txBody>
+          <a:bodyPr/>
+          <a:lstStyle/>
+          <a:p>
+            <a:r>
+              <a:rPr lang="en-FR"/>
+              <a:t>Au lieu de mettre random mettre sur le meme graphe margin sans biais et avec biais avec labeled ratio diff
+</a:t>
+            </a:r>
+          </a:p>
+        </p188:txBody>
+      </p188:reply>
+    </p188:replyLst>
     <p188:txBody>
       <a:bodyPr/>
       <a:lstStyle/>
@@ -4984,6 +5128,20 @@
       <pc:docMk/>
       <pc:sldMk cId="722309711" sldId="2147375931"/>
     </pc:sldMkLst>
+    <p188:replyLst>
+      <p188:reply id="{62E0EACF-E0BA-AB45-BCF9-BE5A0BF4CE09}" authorId="{94A73E68-2069-531B-8B48-F270E7F36FDF}" created="2025-04-08T14:11:19.789">
+        <p188:txBody>
+          <a:bodyPr/>
+          <a:lstStyle/>
+          <a:p>
+            <a:r>
+              <a:rPr lang="en-FR"/>
+              <a:t>Dip la conclu en mettant 20% données aussi efficace que 100. AL ne fait jamais perdre de perf. Avec peu de données peut avoir bons result</a:t>
+            </a:r>
+          </a:p>
+        </p188:txBody>
+      </p188:reply>
+    </p188:replyLst>
     <p188:txBody>
       <a:bodyPr/>
       <a:lstStyle/>
@@ -5005,6 +5163,21 @@
       <pc:docMk/>
       <pc:sldMk cId="722309711" sldId="2147375931"/>
     </pc:sldMkLst>
+    <p188:replyLst>
+      <p188:reply id="{D30A98B0-980A-5943-B45C-D7CBE29D01EB}" authorId="{94A73E68-2069-531B-8B48-F270E7F36FDF}" created="2025-04-08T14:17:37.762">
+        <p188:txBody>
+          <a:bodyPr/>
+          <a:lstStyle/>
+          <a:p>
+            <a:r>
+              <a:rPr lang="en-FR"/>
+              <a:t>Préciserun peu mais 1 bullet point suffit
+</a:t>
+            </a:r>
+          </a:p>
+        </p188:txBody>
+      </p188:reply>
+    </p188:replyLst>
     <p188:txBody>
       <a:bodyPr/>
       <a:lstStyle/>
@@ -5026,6 +5199,20 @@
       <pc:docMk/>
       <pc:sldMk cId="722309711" sldId="2147375931"/>
     </pc:sldMkLst>
+    <p188:replyLst>
+      <p188:reply id="{F027F5B4-9533-BA4B-B0D1-BA7796DA667A}" authorId="{94A73E68-2069-531B-8B48-F270E7F36FDF}" created="2025-04-08T14:20:59.908">
+        <p188:txBody>
+          <a:bodyPr/>
+          <a:lstStyle/>
+          <a:p>
+            <a:r>
+              <a:rPr lang="en-FR"/>
+              <a:t>Cest pas grave mais bcp finit car AL fonctionne mais des qu’on peut le faire il faut car meilleur result plus rapide</a:t>
+            </a:r>
+          </a:p>
+        </p188:txBody>
+      </p188:reply>
+    </p188:replyLst>
     <p188:txBody>
       <a:bodyPr/>
       <a:lstStyle/>
@@ -5068,6 +5255,20 @@
       <pc:docMk/>
       <pc:sldMk cId="722309711" sldId="2147375931"/>
     </pc:sldMkLst>
+    <p188:replyLst>
+      <p188:reply id="{EB0EC100-8E5C-0146-B1CE-E1466379F276}" authorId="{94A73E68-2069-531B-8B48-F270E7F36FDF}" created="2025-04-08T14:29:05.307">
+        <p188:txBody>
+          <a:bodyPr/>
+          <a:lstStyle/>
+          <a:p>
+            <a:r>
+              <a:rPr lang="en-FR"/>
+              <a:t>Négligeable pr au cout de réentrainement du modèle</a:t>
+            </a:r>
+          </a:p>
+        </p188:txBody>
+      </p188:reply>
+    </p188:replyLst>
     <p188:txBody>
       <a:bodyPr/>
       <a:lstStyle/>
@@ -21219,7 +21420,7 @@
                 </a:solidFill>
                 <a:latin typeface="Metropolis Black" panose="00000A00000000000000" pitchFamily="50" charset="0"/>
               </a:rPr>
-              <a:t>Effective for 2 classes</a:t>
+              <a:t>Effective with a few classes</a:t>
             </a:r>
           </a:p>
         </p:txBody>
@@ -21341,7 +21542,7 @@
                 </a:solidFill>
                 <a:latin typeface="Metropolis Black" panose="00000A00000000000000" pitchFamily="50" charset="0"/>
               </a:rPr>
-              <a:t>Effective for multi-classes</a:t>
+              <a:t>Effective with multi-classes</a:t>
             </a:r>
           </a:p>
         </p:txBody>
@@ -21469,7 +21670,7 @@
                 </a:solidFill>
                 <a:latin typeface="Metropolis Black" panose="00000A00000000000000" pitchFamily="50" charset="0"/>
               </a:rPr>
-              <a:t>Take into account the probabilities of all classes</a:t>
+              <a:t>Takes into account the probabilities of all classes</a:t>
             </a:r>
           </a:p>
         </p:txBody>
@@ -21653,7 +21854,7 @@
                 </a:solidFill>
                 <a:latin typeface="Metropolis Black" panose="00000A00000000000000" pitchFamily="50" charset="0"/>
               </a:rPr>
-              <a:t>Only considers the probabilities of 2 classes</a:t>
+              <a:t>Only considers the probabilities of 1 class</a:t>
             </a:r>
           </a:p>
         </p:txBody>
@@ -21770,12 +21971,15 @@
           <a:lstStyle/>
           <a:p>
             <a:pPr algn="ctr"/>
-            <a:endParaRPr lang="en-US" sz="1400" dirty="0">
-              <a:solidFill>
-                <a:schemeClr val="tx1"/>
-              </a:solidFill>
-              <a:latin typeface="Metropolis Black" panose="00000A00000000000000" pitchFamily="50" charset="0"/>
-            </a:endParaRPr>
+            <a:r>
+              <a:rPr lang="en-US" sz="1400" dirty="0">
+                <a:solidFill>
+                  <a:schemeClr val="tx1"/>
+                </a:solidFill>
+                <a:latin typeface="Metropolis Black" panose="00000A00000000000000" pitchFamily="50" charset="0"/>
+              </a:rPr>
+              <a:t>Harder to interpret / Less intuitive </a:t>
+            </a:r>
           </a:p>
         </p:txBody>
       </p:sp>
@@ -29139,7 +29343,7 @@
         <p:spPr>
           <a:xfrm>
             <a:off x="68580" y="437393"/>
-            <a:ext cx="4510217" cy="498597"/>
+            <a:ext cx="4156939" cy="498597"/>
           </a:xfrm>
         </p:spPr>
         <p:txBody>
@@ -29148,13 +29352,7 @@
           <a:p>
             <a:r>
               <a:rPr lang="en-GB" sz="3200" dirty="0"/>
-              <a:t>Impact of retraining </a:t>
-            </a:r>
-          </a:p>
-          <a:p>
-            <a:r>
-              <a:rPr lang="en-GB" sz="3200" dirty="0"/>
-              <a:t>on PRS</a:t>
+              <a:t>Impact of retraining on PRS</a:t>
             </a:r>
           </a:p>
         </p:txBody>
@@ -30909,7 +31107,7 @@
                 </a:solidFill>
                 <a:latin typeface="Metropolis Black" panose="00000A00000000000000" pitchFamily="50" charset="0"/>
               </a:rPr>
-              <a:t>The more often we retrain, the best</a:t>
+              <a:t>The more often we retrain, the better</a:t>
             </a:r>
           </a:p>
         </p:txBody>
@@ -32539,7 +32737,7 @@
                 </a:solidFill>
                 <a:latin typeface="Metropolis Black" panose="00000A00000000000000" pitchFamily="50" charset="0"/>
               </a:rPr>
-              <a:t>The more often we retrain, the best</a:t>
+              <a:t>The more often we retrain, the better</a:t>
             </a:r>
           </a:p>
         </p:txBody>
@@ -32698,6 +32896,106 @@
       </p:grpSpPr>
       <p:sp>
         <p:nvSpPr>
+          <p:cNvPr id="16" name="Google Shape;12529;p1190">
+            <a:extLst>
+              <a:ext uri="{FF2B5EF4-FFF2-40B4-BE49-F238E27FC236}">
+                <a16:creationId xmlns:a16="http://schemas.microsoft.com/office/drawing/2014/main" id="{C62FCB2B-309B-4EBC-395D-14B9EBBDD447}"/>
+              </a:ext>
+            </a:extLst>
+          </p:cNvPr>
+          <p:cNvSpPr/>
+          <p:nvPr/>
+        </p:nvSpPr>
+        <p:spPr>
+          <a:xfrm>
+            <a:off x="3247494" y="3705917"/>
+            <a:ext cx="8750456" cy="2517935"/>
+          </a:xfrm>
+          <a:prstGeom prst="rect">
+            <a:avLst/>
+          </a:prstGeom>
+          <a:solidFill>
+            <a:srgbClr val="FFFFFF"/>
+          </a:solidFill>
+          <a:ln>
+            <a:noFill/>
+          </a:ln>
+          <a:effectLst>
+            <a:outerShdw blurRad="57150" dist="19050" dir="5400000" algn="bl" rotWithShape="0">
+              <a:srgbClr val="000000">
+                <a:alpha val="50000"/>
+              </a:srgbClr>
+            </a:outerShdw>
+          </a:effectLst>
+        </p:spPr>
+        <p:txBody>
+          <a:bodyPr spcFirstLastPara="1" wrap="square" lIns="36000" tIns="36000" rIns="36000" bIns="36000" anchor="ctr" anchorCtr="0">
+            <a:noAutofit/>
+          </a:bodyPr>
+          <a:lstStyle/>
+          <a:p>
+            <a:pPr algn="ctr"/>
+            <a:endParaRPr lang="en-GB" sz="1400" dirty="0">
+              <a:solidFill>
+                <a:schemeClr val="accent5"/>
+              </a:solidFill>
+              <a:latin typeface="+mj-lt"/>
+            </a:endParaRPr>
+          </a:p>
+        </p:txBody>
+      </p:sp>
+      <p:sp>
+        <p:nvSpPr>
+          <p:cNvPr id="15" name="Google Shape;12529;p1190">
+            <a:extLst>
+              <a:ext uri="{FF2B5EF4-FFF2-40B4-BE49-F238E27FC236}">
+                <a16:creationId xmlns:a16="http://schemas.microsoft.com/office/drawing/2014/main" id="{BE9729BF-54BF-95C9-00A8-49E1D25845A9}"/>
+              </a:ext>
+            </a:extLst>
+          </p:cNvPr>
+          <p:cNvSpPr/>
+          <p:nvPr/>
+        </p:nvSpPr>
+        <p:spPr>
+          <a:xfrm>
+            <a:off x="3247494" y="516216"/>
+            <a:ext cx="8738071" cy="2517935"/>
+          </a:xfrm>
+          <a:prstGeom prst="rect">
+            <a:avLst/>
+          </a:prstGeom>
+          <a:solidFill>
+            <a:srgbClr val="FFFFFF"/>
+          </a:solidFill>
+          <a:ln>
+            <a:noFill/>
+          </a:ln>
+          <a:effectLst>
+            <a:outerShdw blurRad="57150" dist="19050" dir="5400000" algn="bl" rotWithShape="0">
+              <a:srgbClr val="000000">
+                <a:alpha val="50000"/>
+              </a:srgbClr>
+            </a:outerShdw>
+          </a:effectLst>
+        </p:spPr>
+        <p:txBody>
+          <a:bodyPr spcFirstLastPara="1" wrap="square" lIns="36000" tIns="36000" rIns="36000" bIns="36000" anchor="ctr" anchorCtr="0">
+            <a:noAutofit/>
+          </a:bodyPr>
+          <a:lstStyle/>
+          <a:p>
+            <a:pPr algn="ctr"/>
+            <a:endParaRPr lang="en-GB" sz="1400" dirty="0">
+              <a:solidFill>
+                <a:schemeClr val="accent5"/>
+              </a:solidFill>
+              <a:latin typeface="+mj-lt"/>
+            </a:endParaRPr>
+          </a:p>
+        </p:txBody>
+      </p:sp>
+      <p:sp>
+        <p:nvSpPr>
           <p:cNvPr id="3" name="Text Placeholder 2">
             <a:extLst>
               <a:ext uri="{FF2B5EF4-FFF2-40B4-BE49-F238E27FC236}">
@@ -32714,8 +33012,8 @@
         </p:nvSpPr>
         <p:spPr>
           <a:xfrm>
-            <a:off x="544002" y="346060"/>
-            <a:ext cx="5509300" cy="498597"/>
+            <a:off x="77225" y="405246"/>
+            <a:ext cx="3041061" cy="498597"/>
           </a:xfrm>
         </p:spPr>
         <p:txBody>
@@ -32724,7 +33022,7 @@
           <a:p>
             <a:r>
               <a:rPr lang="en-GB" dirty="0"/>
-              <a:t>Impact of bias on AL</a:t>
+              <a:t>Impact of bias on PRS</a:t>
             </a:r>
           </a:p>
         </p:txBody>
@@ -32743,7 +33041,7 @@
         </p:nvSpPr>
         <p:spPr>
           <a:xfrm>
-            <a:off x="5181199" y="255582"/>
+            <a:off x="430043" y="1774006"/>
             <a:ext cx="1929070" cy="720691"/>
           </a:xfrm>
           <a:prstGeom prst="roundRect">
@@ -32880,7 +33178,7 @@
           <a:p>
             <a:pPr algn="ctr"/>
             <a:r>
-              <a:rPr lang="en-GB" sz="1400" b="1" dirty="0" err="1">
+              <a:rPr lang="en-GB" sz="1400" dirty="0" err="1">
                 <a:solidFill>
                   <a:srgbClr val="000000"/>
                 </a:solidFill>
@@ -32889,7 +33187,7 @@
               <a:t>batch_ratio</a:t>
             </a:r>
             <a:r>
-              <a:rPr lang="en-GB" sz="1400" b="1" dirty="0">
+              <a:rPr lang="en-GB" sz="1400" dirty="0">
                 <a:solidFill>
                   <a:srgbClr val="000000"/>
                 </a:solidFill>
@@ -32901,7 +33199,7 @@
           <a:p>
             <a:pPr algn="ctr"/>
             <a:r>
-              <a:rPr lang="en-GB" sz="1400" b="1" dirty="0" err="1">
+              <a:rPr lang="en-GB" sz="1400" dirty="0" err="1">
                 <a:solidFill>
                   <a:srgbClr val="000000"/>
                 </a:solidFill>
@@ -32910,7 +33208,7 @@
               <a:t>test_size</a:t>
             </a:r>
             <a:r>
-              <a:rPr lang="en-GB" sz="1400" b="1" dirty="0">
+              <a:rPr lang="en-GB" sz="1400" dirty="0">
                 <a:solidFill>
                   <a:srgbClr val="000000"/>
                 </a:solidFill>
@@ -32918,7 +33216,7 @@
               </a:rPr>
               <a:t> = 20%</a:t>
             </a:r>
-            <a:endParaRPr lang="en-US" b="1" dirty="0">
+            <a:endParaRPr lang="en-US" dirty="0">
               <a:solidFill>
                 <a:schemeClr val="tx1"/>
               </a:solidFill>
@@ -32941,8 +33239,8 @@
         </p:nvSpPr>
         <p:spPr>
           <a:xfrm>
-            <a:off x="7449121" y="303192"/>
-            <a:ext cx="4485407" cy="625473"/>
+            <a:off x="194050" y="3239895"/>
+            <a:ext cx="2468751" cy="625473"/>
           </a:xfrm>
           <a:prstGeom prst="roundRect">
             <a:avLst>
@@ -33119,10 +33417,10 @@
       </p:sp>
       <p:sp>
         <p:nvSpPr>
-          <p:cNvPr id="6" name="Google Shape;12529;p1190">
-            <a:extLst>
-              <a:ext uri="{FF2B5EF4-FFF2-40B4-BE49-F238E27FC236}">
-                <a16:creationId xmlns:a16="http://schemas.microsoft.com/office/drawing/2014/main" id="{FC4FAEE7-F7DD-7FB8-1514-7853D17974D4}"/>
+          <p:cNvPr id="17" name="Rectangle : coins arrondis 18">
+            <a:extLst>
+              <a:ext uri="{FF2B5EF4-FFF2-40B4-BE49-F238E27FC236}">
+                <a16:creationId xmlns:a16="http://schemas.microsoft.com/office/drawing/2014/main" id="{A5B4ACF3-CF5B-30AD-20CB-84CF4DDBA782}"/>
               </a:ext>
             </a:extLst>
           </p:cNvPr>
@@ -33131,290 +33429,8 @@
         </p:nvSpPr>
         <p:spPr>
           <a:xfrm>
-            <a:off x="49735" y="1662821"/>
-            <a:ext cx="6046265" cy="4658848"/>
-          </a:xfrm>
-          <a:prstGeom prst="rect">
-            <a:avLst/>
-          </a:prstGeom>
-          <a:solidFill>
-            <a:srgbClr val="FFFFFF"/>
-          </a:solidFill>
-          <a:ln>
-            <a:noFill/>
-          </a:ln>
-          <a:effectLst>
-            <a:outerShdw blurRad="57150" dist="19050" dir="5400000" algn="bl" rotWithShape="0">
-              <a:srgbClr val="000000">
-                <a:alpha val="50000"/>
-              </a:srgbClr>
-            </a:outerShdw>
-          </a:effectLst>
-        </p:spPr>
-        <p:txBody>
-          <a:bodyPr spcFirstLastPara="1" wrap="square" lIns="36000" tIns="36000" rIns="36000" bIns="36000" anchor="ctr" anchorCtr="0">
-            <a:noAutofit/>
-          </a:bodyPr>
-          <a:lstStyle/>
-          <a:p>
-            <a:pPr algn="ctr"/>
-            <a:endParaRPr lang="en-GB" sz="1400">
-              <a:solidFill>
-                <a:schemeClr val="accent5"/>
-              </a:solidFill>
-              <a:latin typeface="+mj-lt"/>
-            </a:endParaRPr>
-          </a:p>
-        </p:txBody>
-      </p:sp>
-      <p:sp>
-        <p:nvSpPr>
-          <p:cNvPr id="7" name="Rectangle : coins arrondis 18">
-            <a:extLst>
-              <a:ext uri="{FF2B5EF4-FFF2-40B4-BE49-F238E27FC236}">
-                <a16:creationId xmlns:a16="http://schemas.microsoft.com/office/drawing/2014/main" id="{AF055C56-DA8B-7967-3810-924C749E336E}"/>
-              </a:ext>
-            </a:extLst>
-          </p:cNvPr>
-          <p:cNvSpPr/>
-          <p:nvPr/>
-        </p:nvSpPr>
-        <p:spPr>
-          <a:xfrm>
-            <a:off x="1687259" y="1410158"/>
-            <a:ext cx="2855745" cy="454568"/>
-          </a:xfrm>
-          <a:prstGeom prst="roundRect">
-            <a:avLst>
-              <a:gd name="adj" fmla="val 0"/>
-            </a:avLst>
-          </a:prstGeom>
-          <a:solidFill>
-            <a:srgbClr val="E10014"/>
-          </a:solidFill>
-          <a:ln>
-            <a:noFill/>
-          </a:ln>
-          <a:effectLst>
-            <a:outerShdw blurRad="57150" dist="19050" dir="5400000" algn="bl" rotWithShape="0">
-              <a:srgbClr val="000000">
-                <a:alpha val="50000"/>
-              </a:srgbClr>
-            </a:outerShdw>
-          </a:effectLst>
-        </p:spPr>
-        <p:txBody>
-          <a:bodyPr spcFirstLastPara="1" wrap="square" lIns="36000" tIns="36000" rIns="36000" bIns="36000" anchor="ctr" anchorCtr="0">
-            <a:noAutofit/>
-          </a:bodyPr>
-          <a:lstStyle/>
-          <a:p>
-            <a:pPr algn="ctr"/>
-            <a:r>
-              <a:rPr lang="en-GB" sz="1200" dirty="0">
-                <a:solidFill>
-                  <a:schemeClr val="bg1"/>
-                </a:solidFill>
-                <a:latin typeface="Metropolis Black" panose="00000A00000000000000" pitchFamily="50" charset="0"/>
-              </a:rPr>
-              <a:t>MNIST (F1-SCORE)</a:t>
-            </a:r>
-            <a:endParaRPr lang="en-GB" sz="1200" b="1" dirty="0">
-              <a:solidFill>
-                <a:schemeClr val="bg1"/>
-              </a:solidFill>
-              <a:latin typeface="Metropolis" panose="00000500000000000000" pitchFamily="50" charset="0"/>
-            </a:endParaRPr>
-          </a:p>
-        </p:txBody>
-      </p:sp>
-      <p:sp>
-        <p:nvSpPr>
-          <p:cNvPr id="9" name="Google Shape;12529;p1190">
-            <a:extLst>
-              <a:ext uri="{FF2B5EF4-FFF2-40B4-BE49-F238E27FC236}">
-                <a16:creationId xmlns:a16="http://schemas.microsoft.com/office/drawing/2014/main" id="{349E058F-7653-8FD4-8492-7B21B38A2B1E}"/>
-              </a:ext>
-            </a:extLst>
-          </p:cNvPr>
-          <p:cNvSpPr/>
-          <p:nvPr/>
-        </p:nvSpPr>
-        <p:spPr>
-          <a:xfrm>
-            <a:off x="6145734" y="1662821"/>
-            <a:ext cx="5996531" cy="4658848"/>
-          </a:xfrm>
-          <a:prstGeom prst="rect">
-            <a:avLst/>
-          </a:prstGeom>
-          <a:solidFill>
-            <a:srgbClr val="FFFFFF"/>
-          </a:solidFill>
-          <a:ln>
-            <a:noFill/>
-          </a:ln>
-          <a:effectLst>
-            <a:outerShdw blurRad="57150" dist="19050" dir="5400000" algn="bl" rotWithShape="0">
-              <a:srgbClr val="000000">
-                <a:alpha val="50000"/>
-              </a:srgbClr>
-            </a:outerShdw>
-          </a:effectLst>
-        </p:spPr>
-        <p:txBody>
-          <a:bodyPr spcFirstLastPara="1" wrap="square" lIns="36000" tIns="36000" rIns="36000" bIns="36000" anchor="ctr" anchorCtr="0">
-            <a:noAutofit/>
-          </a:bodyPr>
-          <a:lstStyle/>
-          <a:p>
-            <a:pPr algn="ctr"/>
-            <a:endParaRPr lang="en-GB" sz="1400">
-              <a:solidFill>
-                <a:schemeClr val="accent5"/>
-              </a:solidFill>
-              <a:latin typeface="+mj-lt"/>
-            </a:endParaRPr>
-          </a:p>
-        </p:txBody>
-      </p:sp>
-      <p:sp>
-        <p:nvSpPr>
-          <p:cNvPr id="10" name="Rectangle : coins arrondis 18">
-            <a:extLst>
-              <a:ext uri="{FF2B5EF4-FFF2-40B4-BE49-F238E27FC236}">
-                <a16:creationId xmlns:a16="http://schemas.microsoft.com/office/drawing/2014/main" id="{71FECF36-344D-E88D-3F90-421B122FBE0A}"/>
-              </a:ext>
-            </a:extLst>
-          </p:cNvPr>
-          <p:cNvSpPr/>
-          <p:nvPr/>
-        </p:nvSpPr>
-        <p:spPr>
-          <a:xfrm>
-            <a:off x="7648998" y="1405500"/>
-            <a:ext cx="2855745" cy="454568"/>
-          </a:xfrm>
-          <a:prstGeom prst="roundRect">
-            <a:avLst>
-              <a:gd name="adj" fmla="val 0"/>
-            </a:avLst>
-          </a:prstGeom>
-          <a:solidFill>
-            <a:srgbClr val="E10014"/>
-          </a:solidFill>
-          <a:ln>
-            <a:noFill/>
-          </a:ln>
-          <a:effectLst>
-            <a:outerShdw blurRad="57150" dist="19050" dir="5400000" algn="bl" rotWithShape="0">
-              <a:srgbClr val="000000">
-                <a:alpha val="50000"/>
-              </a:srgbClr>
-            </a:outerShdw>
-          </a:effectLst>
-        </p:spPr>
-        <p:txBody>
-          <a:bodyPr spcFirstLastPara="1" wrap="square" lIns="36000" tIns="36000" rIns="36000" bIns="36000" anchor="ctr" anchorCtr="0">
-            <a:noAutofit/>
-          </a:bodyPr>
-          <a:lstStyle/>
-          <a:p>
-            <a:pPr algn="ctr"/>
-            <a:r>
-              <a:rPr lang="en-GB" sz="1200" dirty="0">
-                <a:solidFill>
-                  <a:schemeClr val="bg1"/>
-                </a:solidFill>
-                <a:latin typeface="Metropolis Black" panose="00000A00000000000000" pitchFamily="50" charset="0"/>
-              </a:rPr>
-              <a:t>PRS (AUC P-R)</a:t>
-            </a:r>
-            <a:endParaRPr lang="en-GB" sz="1200" b="1" dirty="0">
-              <a:solidFill>
-                <a:schemeClr val="bg1"/>
-              </a:solidFill>
-              <a:latin typeface="Metropolis" panose="00000500000000000000" pitchFamily="50" charset="0"/>
-            </a:endParaRPr>
-          </a:p>
-        </p:txBody>
-      </p:sp>
-      <p:pic>
-        <p:nvPicPr>
-          <p:cNvPr id="13" name="Picture 12">
-            <a:extLst>
-              <a:ext uri="{FF2B5EF4-FFF2-40B4-BE49-F238E27FC236}">
-                <a16:creationId xmlns:a16="http://schemas.microsoft.com/office/drawing/2014/main" id="{6FA23D6D-4A8A-5FE1-D6AA-802C3C519A4F}"/>
-              </a:ext>
-            </a:extLst>
-          </p:cNvPr>
-          <p:cNvPicPr>
-            <a:picLocks noChangeAspect="1"/>
-          </p:cNvPicPr>
-          <p:nvPr/>
-        </p:nvPicPr>
-        <p:blipFill>
-          <a:blip r:embed="rId4"/>
-          <a:stretch>
-            <a:fillRect/>
-          </a:stretch>
-        </p:blipFill>
-        <p:spPr>
-          <a:xfrm>
-            <a:off x="179318" y="2117389"/>
-            <a:ext cx="5873984" cy="2551326"/>
-          </a:xfrm>
-          <a:prstGeom prst="rect">
-            <a:avLst/>
-          </a:prstGeom>
-        </p:spPr>
-      </p:pic>
-      <p:pic>
-        <p:nvPicPr>
-          <p:cNvPr id="14" name="Picture 13">
-            <a:extLst>
-              <a:ext uri="{FF2B5EF4-FFF2-40B4-BE49-F238E27FC236}">
-                <a16:creationId xmlns:a16="http://schemas.microsoft.com/office/drawing/2014/main" id="{FE12C25B-DFE0-B38D-4D00-BD590C9054F5}"/>
-              </a:ext>
-            </a:extLst>
-          </p:cNvPr>
-          <p:cNvPicPr>
-            <a:picLocks noChangeAspect="1"/>
-          </p:cNvPicPr>
-          <p:nvPr/>
-        </p:nvPicPr>
-        <p:blipFill>
-          <a:blip r:embed="rId5"/>
-          <a:stretch>
-            <a:fillRect/>
-          </a:stretch>
-        </p:blipFill>
-        <p:spPr>
-          <a:xfrm>
-            <a:off x="781118" y="5076219"/>
-            <a:ext cx="1162684" cy="558088"/>
-          </a:xfrm>
-          <a:prstGeom prst="rect">
-            <a:avLst/>
-          </a:prstGeom>
-        </p:spPr>
-      </p:pic>
-      <p:sp>
-        <p:nvSpPr>
-          <p:cNvPr id="17" name="Rectangle : coins arrondis 18">
-            <a:extLst>
-              <a:ext uri="{FF2B5EF4-FFF2-40B4-BE49-F238E27FC236}">
-                <a16:creationId xmlns:a16="http://schemas.microsoft.com/office/drawing/2014/main" id="{A5B4ACF3-CF5B-30AD-20CB-84CF4DDBA782}"/>
-              </a:ext>
-            </a:extLst>
-          </p:cNvPr>
-          <p:cNvSpPr/>
-          <p:nvPr/>
-        </p:nvSpPr>
-        <p:spPr>
-          <a:xfrm>
-            <a:off x="2675185" y="4994917"/>
-            <a:ext cx="2439361" cy="720691"/>
+            <a:off x="6448178" y="2598225"/>
+            <a:ext cx="2336699" cy="314785"/>
           </a:xfrm>
           <a:prstGeom prst="roundRect">
             <a:avLst>
@@ -33422,15 +33438,11 @@
             </a:avLst>
           </a:prstGeom>
           <a:solidFill>
-            <a:schemeClr val="bg1">
-              <a:lumMod val="95000"/>
-            </a:schemeClr>
+            <a:schemeClr val="bg1"/>
           </a:solidFill>
           <a:ln>
             <a:solidFill>
-              <a:schemeClr val="bg2">
-                <a:lumMod val="90000"/>
-              </a:schemeClr>
+              <a:schemeClr val="bg2"/>
             </a:solidFill>
           </a:ln>
         </p:spPr>
@@ -33576,12 +33588,102 @@
           </a:p>
         </p:txBody>
       </p:sp>
+      <p:pic>
+        <p:nvPicPr>
+          <p:cNvPr id="2" name="Picture 1">
+            <a:extLst>
+              <a:ext uri="{FF2B5EF4-FFF2-40B4-BE49-F238E27FC236}">
+                <a16:creationId xmlns:a16="http://schemas.microsoft.com/office/drawing/2014/main" id="{48FCF1B2-A717-69DD-6AC7-1D2992ECE404}"/>
+              </a:ext>
+            </a:extLst>
+          </p:cNvPr>
+          <p:cNvPicPr>
+            <a:picLocks noChangeAspect="1"/>
+          </p:cNvPicPr>
+          <p:nvPr/>
+        </p:nvPicPr>
+        <p:blipFill>
+          <a:blip r:embed="rId4"/>
+          <a:stretch>
+            <a:fillRect/>
+          </a:stretch>
+        </p:blipFill>
+        <p:spPr>
+          <a:xfrm>
+            <a:off x="340478" y="4759288"/>
+            <a:ext cx="2108200" cy="508000"/>
+          </a:xfrm>
+          <a:prstGeom prst="rect">
+            <a:avLst/>
+          </a:prstGeom>
+        </p:spPr>
+      </p:pic>
+      <p:pic>
+        <p:nvPicPr>
+          <p:cNvPr id="5" name="Picture 4">
+            <a:extLst>
+              <a:ext uri="{FF2B5EF4-FFF2-40B4-BE49-F238E27FC236}">
+                <a16:creationId xmlns:a16="http://schemas.microsoft.com/office/drawing/2014/main" id="{7C710CA8-F708-7AB0-7379-2735ECE3061C}"/>
+              </a:ext>
+            </a:extLst>
+          </p:cNvPr>
+          <p:cNvPicPr>
+            <a:picLocks noChangeAspect="1"/>
+          </p:cNvPicPr>
+          <p:nvPr/>
+        </p:nvPicPr>
+        <p:blipFill>
+          <a:blip r:embed="rId5"/>
+          <a:stretch>
+            <a:fillRect/>
+          </a:stretch>
+        </p:blipFill>
+        <p:spPr>
+          <a:xfrm>
+            <a:off x="3452416" y="3857957"/>
+            <a:ext cx="8392480" cy="1846610"/>
+          </a:xfrm>
+          <a:prstGeom prst="rect">
+            <a:avLst/>
+          </a:prstGeom>
+        </p:spPr>
+      </p:pic>
+      <p:pic>
+        <p:nvPicPr>
+          <p:cNvPr id="20" name="Picture 19">
+            <a:extLst>
+              <a:ext uri="{FF2B5EF4-FFF2-40B4-BE49-F238E27FC236}">
+                <a16:creationId xmlns:a16="http://schemas.microsoft.com/office/drawing/2014/main" id="{30F675D7-2782-E3F9-6F2A-C6FD35A07553}"/>
+              </a:ext>
+            </a:extLst>
+          </p:cNvPr>
+          <p:cNvPicPr>
+            <a:picLocks noChangeAspect="1"/>
+          </p:cNvPicPr>
+          <p:nvPr/>
+        </p:nvPicPr>
+        <p:blipFill>
+          <a:blip r:embed="rId6"/>
+          <a:stretch>
+            <a:fillRect/>
+          </a:stretch>
+        </p:blipFill>
+        <p:spPr>
+          <a:xfrm>
+            <a:off x="3420287" y="621455"/>
+            <a:ext cx="8392480" cy="1902475"/>
+          </a:xfrm>
+          <a:prstGeom prst="rect">
+            <a:avLst/>
+          </a:prstGeom>
+        </p:spPr>
+      </p:pic>
       <p:sp>
         <p:nvSpPr>
-          <p:cNvPr id="18" name="Rectangle : coins arrondis 18">
-            <a:extLst>
-              <a:ext uri="{FF2B5EF4-FFF2-40B4-BE49-F238E27FC236}">
-                <a16:creationId xmlns:a16="http://schemas.microsoft.com/office/drawing/2014/main" id="{676DDDA8-3ACE-342E-EC31-1A4E96F69819}"/>
+          <p:cNvPr id="21" name="Rectangle : coins arrondis 18">
+            <a:extLst>
+              <a:ext uri="{FF2B5EF4-FFF2-40B4-BE49-F238E27FC236}">
+                <a16:creationId xmlns:a16="http://schemas.microsoft.com/office/drawing/2014/main" id="{3ADE73F5-0E39-46B1-73AE-9AE678D68F47}"/>
               </a:ext>
             </a:extLst>
           </p:cNvPr>
@@ -33590,8 +33692,8 @@
         </p:nvSpPr>
         <p:spPr>
           <a:xfrm>
-            <a:off x="9285062" y="4987394"/>
-            <a:ext cx="2439361" cy="720691"/>
+            <a:off x="6448178" y="5786472"/>
+            <a:ext cx="2336699" cy="314785"/>
           </a:xfrm>
           <a:prstGeom prst="roundRect">
             <a:avLst>
@@ -33599,15 +33701,11 @@
             </a:avLst>
           </a:prstGeom>
           <a:solidFill>
-            <a:schemeClr val="bg1">
-              <a:lumMod val="95000"/>
-            </a:schemeClr>
+            <a:schemeClr val="bg1"/>
           </a:solidFill>
           <a:ln>
             <a:solidFill>
-              <a:schemeClr val="bg2">
-                <a:lumMod val="90000"/>
-              </a:schemeClr>
+              <a:schemeClr val="bg2"/>
             </a:solidFill>
           </a:ln>
         </p:spPr>
@@ -33742,7 +33840,7 @@
                 </a:solidFill>
                 <a:latin typeface="Metropolis" pitchFamily="2" charset="77"/>
               </a:rPr>
-              <a:t> = 10%</a:t>
+              <a:t> = 9.15%</a:t>
             </a:r>
             <a:endParaRPr lang="en-US" b="1" dirty="0">
               <a:solidFill>
@@ -33753,66 +33851,6 @@
           </a:p>
         </p:txBody>
       </p:sp>
-      <p:pic>
-        <p:nvPicPr>
-          <p:cNvPr id="19" name="Picture 18">
-            <a:extLst>
-              <a:ext uri="{FF2B5EF4-FFF2-40B4-BE49-F238E27FC236}">
-                <a16:creationId xmlns:a16="http://schemas.microsoft.com/office/drawing/2014/main" id="{708CCCEC-96F4-E404-7F40-75CE4A81DA03}"/>
-              </a:ext>
-            </a:extLst>
-          </p:cNvPr>
-          <p:cNvPicPr>
-            <a:picLocks noChangeAspect="1"/>
-          </p:cNvPicPr>
-          <p:nvPr/>
-        </p:nvPicPr>
-        <p:blipFill>
-          <a:blip r:embed="rId6"/>
-          <a:stretch>
-            <a:fillRect/>
-          </a:stretch>
-        </p:blipFill>
-        <p:spPr>
-          <a:xfrm>
-            <a:off x="6266863" y="2153337"/>
-            <a:ext cx="5816416" cy="2551326"/>
-          </a:xfrm>
-          <a:prstGeom prst="rect">
-            <a:avLst/>
-          </a:prstGeom>
-        </p:spPr>
-      </p:pic>
-      <p:pic>
-        <p:nvPicPr>
-          <p:cNvPr id="22" name="Picture 21">
-            <a:extLst>
-              <a:ext uri="{FF2B5EF4-FFF2-40B4-BE49-F238E27FC236}">
-                <a16:creationId xmlns:a16="http://schemas.microsoft.com/office/drawing/2014/main" id="{0FC754E4-031F-113B-BDAC-422A417CA07C}"/>
-              </a:ext>
-            </a:extLst>
-          </p:cNvPr>
-          <p:cNvPicPr>
-            <a:picLocks noChangeAspect="1"/>
-          </p:cNvPicPr>
-          <p:nvPr/>
-        </p:nvPicPr>
-        <p:blipFill>
-          <a:blip r:embed="rId7"/>
-          <a:stretch>
-            <a:fillRect/>
-          </a:stretch>
-        </p:blipFill>
-        <p:spPr>
-          <a:xfrm>
-            <a:off x="6991529" y="5153278"/>
-            <a:ext cx="1314938" cy="496203"/>
-          </a:xfrm>
-          <a:prstGeom prst="rect">
-            <a:avLst/>
-          </a:prstGeom>
-        </p:spPr>
-      </p:pic>
     </p:spTree>
     <p:extLst>
       <p:ext uri="{BB962C8B-B14F-4D97-AF65-F5344CB8AC3E}">
@@ -34099,7 +34137,7 @@
                 </a:solidFill>
                 <a:latin typeface="Metropolis Black" panose="00000A00000000000000" pitchFamily="50" charset="0"/>
               </a:rPr>
-              <a:t>The more often we retrain, the best</a:t>
+              <a:t>The more often we retrain, the better</a:t>
             </a:r>
           </a:p>
         </p:txBody>
@@ -35064,7 +35102,7 @@
                 </a:solidFill>
                 <a:latin typeface="Metropolis Black" panose="00000A00000000000000" pitchFamily="50" charset="0"/>
               </a:rPr>
-              <a:t>The more often we retrain, the best</a:t>
+              <a:t>The more often we retrain, the better</a:t>
             </a:r>
           </a:p>
         </p:txBody>
@@ -35509,7 +35547,7 @@
                 <a:ea typeface="+mn-ea"/>
                 <a:cs typeface="+mn-cs"/>
               </a:rPr>
-              <a:t>LA SUITE </a:t>
+              <a:t>Next Steps</a:t>
             </a:r>
           </a:p>
         </p:txBody>
@@ -37302,12 +37340,12 @@
                     <a:p>
                       <a:pPr algn="r" fontAlgn="b"/>
                       <a:r>
-                        <a:rPr lang="en-FR" sz="1200" u="none" strike="noStrike">
+                        <a:rPr lang="en-FR" sz="1200" u="none" strike="noStrike" dirty="0">
                           <a:effectLst/>
                         </a:rPr>
                         <a:t>614</a:t>
                       </a:r>
-                      <a:endParaRPr lang="en-FR" sz="1200" b="0" i="0" u="none" strike="noStrike">
+                      <a:endParaRPr lang="en-FR" sz="1200" b="0" i="0" u="none" strike="noStrike" dirty="0">
                         <a:solidFill>
                           <a:srgbClr val="000000"/>
                         </a:solidFill>
@@ -37463,12 +37501,12 @@
                     <a:p>
                       <a:pPr algn="r" fontAlgn="b"/>
                       <a:r>
-                        <a:rPr lang="en-FR" sz="1200" u="none" strike="noStrike">
+                        <a:rPr lang="en-FR" sz="1200" u="none" strike="noStrike" dirty="0">
                           <a:effectLst/>
                         </a:rPr>
                         <a:t>0,003</a:t>
                       </a:r>
-                      <a:endParaRPr lang="en-FR" sz="1200" b="0" i="0" u="none" strike="noStrike">
+                      <a:endParaRPr lang="en-FR" sz="1200" b="0" i="0" u="none" strike="noStrike" dirty="0">
                         <a:solidFill>
                           <a:srgbClr val="000000"/>
                         </a:solidFill>
@@ -38112,12 +38150,12 @@
                     <a:p>
                       <a:pPr algn="r" fontAlgn="b"/>
                       <a:r>
-                        <a:rPr lang="en-FR" sz="1200" u="none" strike="noStrike">
+                        <a:rPr lang="en-FR" sz="1200" u="none" strike="noStrike" dirty="0">
                           <a:effectLst/>
                         </a:rPr>
                         <a:t>0,7</a:t>
                       </a:r>
-                      <a:endParaRPr lang="en-FR" sz="1200" b="0" i="0" u="none" strike="noStrike">
+                      <a:endParaRPr lang="en-FR" sz="1200" b="0" i="0" u="none" strike="noStrike" dirty="0">
                         <a:solidFill>
                           <a:srgbClr val="000000"/>
                         </a:solidFill>
@@ -38135,12 +38173,12 @@
                     <a:p>
                       <a:pPr algn="r" fontAlgn="b"/>
                       <a:r>
-                        <a:rPr lang="en-FR" sz="1200" u="none" strike="noStrike">
+                        <a:rPr lang="en-FR" sz="1200" u="none" strike="noStrike" dirty="0">
                           <a:effectLst/>
                         </a:rPr>
                         <a:t>0,9</a:t>
                       </a:r>
-                      <a:endParaRPr lang="en-FR" sz="1200" b="0" i="0" u="none" strike="noStrike">
+                      <a:endParaRPr lang="en-FR" sz="1200" b="0" i="0" u="none" strike="noStrike" dirty="0">
                         <a:solidFill>
                           <a:srgbClr val="000000"/>
                         </a:solidFill>
@@ -38668,9 +38706,27 @@
                 <a:solidFill>
                   <a:schemeClr val="tx1"/>
                 </a:solidFill>
-                <a:latin typeface="Metropolis Black" panose="00000A00000000000000" pitchFamily="50" charset="0"/>
+                <a:latin typeface="Metropolis" pitchFamily="2" charset="77"/>
               </a:rPr>
-              <a:t>Access to lots of data in many fields</a:t>
+              <a:t>Access to </a:t>
+            </a:r>
+            <a:r>
+              <a:rPr lang="en-US" sz="2000" b="1" dirty="0">
+                <a:solidFill>
+                  <a:schemeClr val="tx1"/>
+                </a:solidFill>
+                <a:latin typeface="Metropolis" pitchFamily="2" charset="77"/>
+              </a:rPr>
+              <a:t>lots of data </a:t>
+            </a:r>
+            <a:r>
+              <a:rPr lang="en-US" sz="2000" dirty="0">
+                <a:solidFill>
+                  <a:schemeClr val="tx1"/>
+                </a:solidFill>
+                <a:latin typeface="Metropolis" pitchFamily="2" charset="77"/>
+              </a:rPr>
+              <a:t>in many fields</a:t>
             </a:r>
           </a:p>
         </p:txBody>
@@ -38776,9 +38832,63 @@
                 <a:solidFill>
                   <a:schemeClr val="tx1"/>
                 </a:solidFill>
-                <a:latin typeface="Metropolis Black" panose="00000A00000000000000" pitchFamily="50" charset="0"/>
+                <a:latin typeface="Metropolis" pitchFamily="2" charset="77"/>
               </a:rPr>
-              <a:t>But labeling is expensive and time-consuming, so a small portion of the data is labeled.</a:t>
+              <a:t>But </a:t>
+            </a:r>
+            <a:r>
+              <a:rPr lang="en-US" sz="2000" b="1" dirty="0">
+                <a:solidFill>
+                  <a:schemeClr val="tx1"/>
+                </a:solidFill>
+                <a:latin typeface="Metropolis" pitchFamily="2" charset="77"/>
+              </a:rPr>
+              <a:t>labeling</a:t>
+            </a:r>
+            <a:r>
+              <a:rPr lang="en-US" sz="2000" dirty="0">
+                <a:solidFill>
+                  <a:schemeClr val="tx1"/>
+                </a:solidFill>
+                <a:latin typeface="Metropolis" pitchFamily="2" charset="77"/>
+              </a:rPr>
+              <a:t> is </a:t>
+            </a:r>
+            <a:r>
+              <a:rPr lang="en-US" sz="2000" b="1" dirty="0">
+                <a:solidFill>
+                  <a:schemeClr val="tx1"/>
+                </a:solidFill>
+                <a:latin typeface="Metropolis" pitchFamily="2" charset="77"/>
+              </a:rPr>
+              <a:t>expensive</a:t>
+            </a:r>
+            <a:r>
+              <a:rPr lang="en-US" sz="2000" dirty="0">
+                <a:solidFill>
+                  <a:schemeClr val="tx1"/>
+                </a:solidFill>
+                <a:latin typeface="Metropolis" pitchFamily="2" charset="77"/>
+              </a:rPr>
+              <a:t> and </a:t>
+            </a:r>
+            <a:r>
+              <a:rPr lang="en-US" sz="2000" b="1" dirty="0">
+                <a:solidFill>
+                  <a:schemeClr val="tx1"/>
+                </a:solidFill>
+                <a:latin typeface="Metropolis" pitchFamily="2" charset="77"/>
+              </a:rPr>
+              <a:t>time-consuming</a:t>
+            </a:r>
+            <a:r>
+              <a:rPr lang="en-US" sz="2000" dirty="0">
+                <a:solidFill>
+                  <a:schemeClr val="tx1"/>
+                </a:solidFill>
+                <a:latin typeface="Metropolis" pitchFamily="2" charset="77"/>
+              </a:rPr>
+              <a:t>, so a small portion of the data is labeled.</a:t>
             </a:r>
           </a:p>
         </p:txBody>
@@ -38884,9 +38994,36 @@
                 <a:solidFill>
                   <a:schemeClr val="tx1"/>
                 </a:solidFill>
-                <a:latin typeface="Metropolis Black" panose="00000A00000000000000" pitchFamily="50" charset="0"/>
+                <a:latin typeface="Metropolis" pitchFamily="2" charset="77"/>
               </a:rPr>
-              <a:t>So need to focus on the most impactful data that we label : this is Active Learning</a:t>
+              <a:t>So need to </a:t>
+            </a:r>
+            <a:r>
+              <a:rPr lang="en-US" sz="2000" b="1" dirty="0">
+                <a:solidFill>
+                  <a:schemeClr val="tx1"/>
+                </a:solidFill>
+                <a:latin typeface="Metropolis" pitchFamily="2" charset="77"/>
+              </a:rPr>
+              <a:t>focus on the most impactful data </a:t>
+            </a:r>
+            <a:r>
+              <a:rPr lang="en-US" sz="2000" dirty="0">
+                <a:solidFill>
+                  <a:schemeClr val="tx1"/>
+                </a:solidFill>
+                <a:latin typeface="Metropolis" pitchFamily="2" charset="77"/>
+              </a:rPr>
+              <a:t>to be labeled : this is </a:t>
+            </a:r>
+            <a:r>
+              <a:rPr lang="en-US" sz="2000" b="1" dirty="0">
+                <a:solidFill>
+                  <a:schemeClr val="tx1"/>
+                </a:solidFill>
+                <a:latin typeface="Metropolis" pitchFamily="2" charset="77"/>
+              </a:rPr>
+              <a:t>Active Learning</a:t>
             </a:r>
           </a:p>
         </p:txBody>
@@ -38927,6 +39064,36 @@
           <a:chExt cx="0" cy="0"/>
         </a:xfrm>
       </p:grpSpPr>
+      <p:pic>
+        <p:nvPicPr>
+          <p:cNvPr id="9" name="Picture 8">
+            <a:extLst>
+              <a:ext uri="{FF2B5EF4-FFF2-40B4-BE49-F238E27FC236}">
+                <a16:creationId xmlns:a16="http://schemas.microsoft.com/office/drawing/2014/main" id="{6FD86277-82CB-9333-C861-BC5E2259B805}"/>
+              </a:ext>
+            </a:extLst>
+          </p:cNvPr>
+          <p:cNvPicPr>
+            <a:picLocks noChangeAspect="1"/>
+          </p:cNvPicPr>
+          <p:nvPr/>
+        </p:nvPicPr>
+        <p:blipFill>
+          <a:blip r:embed="rId3"/>
+          <a:stretch>
+            <a:fillRect/>
+          </a:stretch>
+        </p:blipFill>
+        <p:spPr>
+          <a:xfrm>
+            <a:off x="7414204" y="3811248"/>
+            <a:ext cx="3868010" cy="2560064"/>
+          </a:xfrm>
+          <a:prstGeom prst="rect">
+            <a:avLst/>
+          </a:prstGeom>
+        </p:spPr>
+      </p:pic>
       <p:sp>
         <p:nvSpPr>
           <p:cNvPr id="2" name="Titre 1">
@@ -38990,10 +39157,10 @@
           <p:nvPr/>
         </p:nvPicPr>
         <p:blipFill>
-          <a:blip r:embed="rId3">
+          <a:blip r:embed="rId4">
             <a:extLst>
               <a:ext uri="{96DAC541-7B7A-43D3-8B79-37D633B846F1}">
-                <asvg:svgBlip xmlns:asvg="http://schemas.microsoft.com/office/drawing/2016/SVG/main" r:embed="rId4"/>
+                <asvg:svgBlip xmlns:asvg="http://schemas.microsoft.com/office/drawing/2016/SVG/main" r:embed="rId5"/>
               </a:ext>
             </a:extLst>
           </a:blip>
@@ -39320,53 +39487,6 @@
           </a:p>
         </p:txBody>
       </p:sp>
-      <p:pic>
-        <p:nvPicPr>
-          <p:cNvPr id="1026" name="Picture 2" descr="The process of active learning. Ambiguous/uncertain samples are... |  Download Scientific Diagram">
-            <a:extLst>
-              <a:ext uri="{FF2B5EF4-FFF2-40B4-BE49-F238E27FC236}">
-                <a16:creationId xmlns:a16="http://schemas.microsoft.com/office/drawing/2014/main" id="{4C6FDCDE-7A84-99F4-74DE-1736040E2068}"/>
-              </a:ext>
-            </a:extLst>
-          </p:cNvPr>
-          <p:cNvPicPr>
-            <a:picLocks noChangeAspect="1" noChangeArrowheads="1"/>
-          </p:cNvPicPr>
-          <p:nvPr/>
-        </p:nvPicPr>
-        <p:blipFill>
-          <a:blip r:embed="rId5">
-            <a:extLst>
-              <a:ext uri="{28A0092B-C50C-407E-A947-70E740481C1C}">
-                <a14:useLocalDpi xmlns:a14="http://schemas.microsoft.com/office/drawing/2010/main" val="0"/>
-              </a:ext>
-            </a:extLst>
-          </a:blip>
-          <a:srcRect/>
-          <a:stretch>
-            <a:fillRect/>
-          </a:stretch>
-        </p:blipFill>
-        <p:spPr bwMode="auto">
-          <a:xfrm>
-            <a:off x="7272180" y="4009782"/>
-            <a:ext cx="3736696" cy="2315559"/>
-          </a:xfrm>
-          <a:prstGeom prst="rect">
-            <a:avLst/>
-          </a:prstGeom>
-          <a:noFill/>
-          <a:extLst>
-            <a:ext uri="{909E8E84-426E-40DD-AFC4-6F175D3DCCD1}">
-              <a14:hiddenFill xmlns:a14="http://schemas.microsoft.com/office/drawing/2010/main">
-                <a:solidFill>
-                  <a:srgbClr val="FFFFFF"/>
-                </a:solidFill>
-              </a14:hiddenFill>
-            </a:ext>
-          </a:extLst>
-        </p:spPr>
-      </p:pic>
       <p:sp>
         <p:nvSpPr>
           <p:cNvPr id="6" name="Rectangle : coins arrondis 18">
@@ -39530,7 +39650,25 @@
                 </a:solidFill>
                 <a:latin typeface="Metropolis" pitchFamily="2" charset="77"/>
               </a:rPr>
-              <a:t>g a fixed labelled dataset to train a model</a:t>
+              <a:t>g a </a:t>
+            </a:r>
+            <a:r>
+              <a:rPr lang="en-GB" sz="1600" b="1" dirty="0">
+                <a:solidFill>
+                  <a:srgbClr val="000000"/>
+                </a:solidFill>
+                <a:latin typeface="Metropolis" pitchFamily="2" charset="77"/>
+              </a:rPr>
+              <a:t>fixed labelled dataset </a:t>
+            </a:r>
+            <a:r>
+              <a:rPr lang="en-GB" sz="1600" dirty="0">
+                <a:solidFill>
+                  <a:srgbClr val="000000"/>
+                </a:solidFill>
+                <a:latin typeface="Metropolis" pitchFamily="2" charset="77"/>
+              </a:rPr>
+              <a:t>to train a model</a:t>
             </a:r>
             <a:endParaRPr lang="en-US" sz="1600" dirty="0">
               <a:solidFill>
@@ -39956,7 +40094,7 @@
                             </p:stCondLst>
                             <p:childTnLst>
                               <p:par>
-                                <p:cTn id="5" presetID="1" presetClass="entr" presetSubtype="0" fill="hold" grpId="0" nodeType="clickEffect">
+                                <p:cTn id="5" presetID="1" presetClass="entr" presetSubtype="0" fill="hold" nodeType="clickEffect">
                                   <p:stCondLst>
                                     <p:cond delay="0"/>
                                   </p:stCondLst>
@@ -39969,7 +40107,7 @@
                                           </p:stCondLst>
                                         </p:cTn>
                                         <p:tgtEl>
-                                          <p:spTgt spid="15"/>
+                                          <p:spTgt spid="9"/>
                                         </p:tgtEl>
                                         <p:attrNameLst>
                                           <p:attrName>style.visibility</p:attrName>
@@ -39983,7 +40121,7 @@
                                 </p:cTn>
                               </p:par>
                               <p:par>
-                                <p:cTn id="7" presetID="1" presetClass="entr" presetSubtype="0" fill="hold" nodeType="withEffect">
+                                <p:cTn id="7" presetID="1" presetClass="entr" presetSubtype="0" fill="hold" grpId="0" nodeType="withEffect">
                                   <p:stCondLst>
                                     <p:cond delay="0"/>
                                   </p:stCondLst>
@@ -39996,7 +40134,7 @@
                                           </p:stCondLst>
                                         </p:cTn>
                                         <p:tgtEl>
-                                          <p:spTgt spid="1026"/>
+                                          <p:spTgt spid="15"/>
                                         </p:tgtEl>
                                         <p:attrNameLst>
                                           <p:attrName>style.visibility</p:attrName>
